--- a/generative-ai-presentation/Introduction_to_Generative_AI.pptx
+++ b/generative-ai-presentation/Introduction_to_Generative_AI.pptx
@@ -17,6 +17,13 @@
     <p:sldId id="265" r:id="rId16"/>
     <p:sldId id="266" r:id="rId17"/>
     <p:sldId id="267" r:id="rId18"/>
+    <p:sldId id="268" r:id="rId19"/>
+    <p:sldId id="269" r:id="rId20"/>
+    <p:sldId id="270" r:id="rId21"/>
+    <p:sldId id="271" r:id="rId22"/>
+    <p:sldId id="272" r:id="rId23"/>
+    <p:sldId id="273" r:id="rId24"/>
+    <p:sldId id="274" r:id="rId25"/>
   </p:sldIdLst>
   <p:sldSz cx="12191695" cy="6858000" type="screen4x3"/>
   <p:notesSz cx="6858000" cy="9144000"/>
@@ -3267,7 +3274,7 @@
                 </a:solidFill>
                 <a:latin typeface="Segoe UI"/>
               </a:rPr>
-              <a:t>MLOPS MONITORING</a:t>
+              <a:t>PRACTICE SCENARIO 1 OF 10</a:t>
             </a:r>
           </a:p>
         </p:txBody>
@@ -3301,7 +3308,7 @@
                 </a:solidFill>
                 <a:latin typeface="Segoe UI"/>
               </a:rPr>
-              <a:t>LLM Safety &amp; Monitoring Integration</a:t>
+              <a:t>Choosing Fine-Tuning vs RAG</a:t>
             </a:r>
           </a:p>
         </p:txBody>
@@ -3314,8 +3321,8 @@
         </p:nvSpPr>
         <p:spPr>
           <a:xfrm>
-            <a:off x="731520" y="1645920"/>
-            <a:ext cx="6217920" cy="2926080"/>
+            <a:off x="731520" y="1371600"/>
+            <a:ext cx="6217920" cy="4754880"/>
           </a:xfrm>
           <a:prstGeom prst="rect">
             <a:avLst/>
@@ -3330,179 +3337,124 @@
           <a:p>
             <a:pPr>
               <a:spcAft>
-                <a:spcPts val="1200"/>
-              </a:spcAft>
-            </a:pPr>
-            <a:r>
-              <a:rPr sz="1300" b="1" i="0">
+                <a:spcPts val="1400"/>
+              </a:spcAft>
+            </a:pPr>
+            <a:r>
+              <a:rPr sz="1200" b="1" i="0">
+                <a:solidFill>
+                  <a:srgbClr val="18181B"/>
+                </a:solidFill>
+                <a:latin typeface="Segoe UI"/>
+              </a:rPr>
+              <a:t>A financial service company wants to build an internal virtual assistant to answer questions about dynamic company policies and daily updated mortgage rates. The documents contain sensitive proprietary information. What is the most cost-effective and architecturally sound pattern on GCP to implement this without exposing the base model to stale information?</a:t>
+            </a:r>
+          </a:p>
+          <a:p>
+            <a:pPr>
+              <a:spcAft>
+                <a:spcPts val="800"/>
+              </a:spcAft>
+            </a:pPr>
+            <a:r>
+              <a:rPr sz="1100" b="1" i="0">
                 <a:solidFill>
                   <a:srgbClr val="1D4ED8"/>
                 </a:solidFill>
                 <a:latin typeface="Segoe UI"/>
               </a:rPr>
-              <a:t>→  </a:t>
-            </a:r>
-            <a:r>
-              <a:rPr sz="1250" b="1" i="0">
-                <a:solidFill>
-                  <a:srgbClr val="18181B"/>
-                </a:solidFill>
-                <a:latin typeface="Segoe UI"/>
-              </a:rPr>
-              <a:t>Content Moderation Filters: </a:t>
-            </a:r>
-            <a:r>
-              <a:rPr sz="1250" b="0" i="0">
+              <a:t>A.  </a:t>
+            </a:r>
+            <a:r>
+              <a:rPr sz="1100" b="0" i="0">
                 <a:solidFill>
                   <a:srgbClr val="3F3F46"/>
                 </a:solidFill>
                 <a:latin typeface="Segoe UI"/>
               </a:rPr>
-              <a:t>Built-in safety hooks that evaluate model queries and responses for harassment, hate speech, and explicit blocks.</a:t>
+              <a:t>Run a Vertex AI custom training pipeline to perform full parameter fine-tuning on the policy documents daily.</a:t>
             </a:r>
           </a:p>
           <a:p>
             <a:pPr>
               <a:spcAft>
-                <a:spcPts val="1200"/>
-              </a:spcAft>
-            </a:pPr>
-            <a:r>
-              <a:rPr sz="1300" b="1" i="0">
+                <a:spcPts val="800"/>
+              </a:spcAft>
+            </a:pPr>
+            <a:r>
+              <a:rPr sz="1100" b="1" i="0">
                 <a:solidFill>
                   <a:srgbClr val="1D4ED8"/>
                 </a:solidFill>
                 <a:latin typeface="Segoe UI"/>
               </a:rPr>
-              <a:t>→  </a:t>
-            </a:r>
-            <a:r>
-              <a:rPr sz="1250" b="1" i="0">
-                <a:solidFill>
-                  <a:srgbClr val="18181B"/>
-                </a:solidFill>
-                <a:latin typeface="Segoe UI"/>
-              </a:rPr>
-              <a:t>Semantic Drift Checks: </a:t>
-            </a:r>
-            <a:r>
-              <a:rPr sz="1250" b="0" i="0">
+              <a:t>B.  </a:t>
+            </a:r>
+            <a:r>
+              <a:rPr sz="1100" b="0" i="0">
                 <a:solidFill>
                   <a:srgbClr val="3F3F46"/>
                 </a:solidFill>
                 <a:latin typeface="Segoe UI"/>
               </a:rPr>
-              <a:t>Monitoring client prompt query patterns over time to capture task drift or adversarial injection patterns.</a:t>
+              <a:t>Build a Retrieval-Augmented Generation (RAG) pipeline by chunking the documents, generating embeddings, indexing them in Vertex AI Vector Search, and injecting retrieved contexts into the prompt.</a:t>
             </a:r>
           </a:p>
           <a:p>
             <a:pPr>
               <a:spcAft>
-                <a:spcPts val="1200"/>
-              </a:spcAft>
-            </a:pPr>
-            <a:r>
-              <a:rPr sz="1300" b="1" i="0">
+                <a:spcPts val="800"/>
+              </a:spcAft>
+            </a:pPr>
+            <a:r>
+              <a:rPr sz="1100" b="1" i="0">
                 <a:solidFill>
                   <a:srgbClr val="1D4ED8"/>
                 </a:solidFill>
                 <a:latin typeface="Segoe UI"/>
               </a:rPr>
-              <a:t>→  </a:t>
-            </a:r>
-            <a:r>
-              <a:rPr sz="1250" b="1" i="0">
-                <a:solidFill>
-                  <a:srgbClr val="18181B"/>
-                </a:solidFill>
-                <a:latin typeface="Segoe UI"/>
-              </a:rPr>
-              <a:t>Guardrails Integration: </a:t>
-            </a:r>
-            <a:r>
-              <a:rPr sz="1250" b="0" i="0">
+              <a:t>C.  </a:t>
+            </a:r>
+            <a:r>
+              <a:rPr sz="1100" b="0" i="0">
                 <a:solidFill>
                   <a:srgbClr val="3F3F46"/>
                 </a:solidFill>
                 <a:latin typeface="Segoe UI"/>
               </a:rPr>
-              <a:t>Wrapping model routes with external middleware to filter toxic language prior to client presentation.</a:t>
-            </a:r>
-          </a:p>
-        </p:txBody>
-      </p:sp>
-      <p:sp>
-        <p:nvSpPr>
-          <p:cNvPr id="5" name="Rectangle 4"/>
-          <p:cNvSpPr/>
-          <p:nvPr/>
-        </p:nvSpPr>
-        <p:spPr>
-          <a:xfrm>
-            <a:off x="731520" y="4754880"/>
-            <a:ext cx="6217920" cy="1371600"/>
-          </a:xfrm>
-          <a:prstGeom prst="rect">
-            <a:avLst/>
-          </a:prstGeom>
-          <a:solidFill>
-            <a:srgbClr val="F4F4F5"/>
-          </a:solidFill>
-          <a:ln w="19050">
-            <a:solidFill>
-              <a:srgbClr val="1D4ED8"/>
-            </a:solidFill>
-          </a:ln>
-        </p:spPr>
-        <p:style>
-          <a:lnRef idx="1">
-            <a:schemeClr val="accent1"/>
-          </a:lnRef>
-          <a:fillRef idx="3">
-            <a:schemeClr val="accent1"/>
-          </a:fillRef>
-          <a:effectRef idx="2">
-            <a:schemeClr val="accent1"/>
-          </a:effectRef>
-          <a:fontRef idx="minor">
-            <a:schemeClr val="lt1"/>
-          </a:fontRef>
-        </p:style>
-        <p:txBody>
-          <a:bodyPr rtlCol="0" anchor="ctr" wrap="square" lIns="182880" rIns="182880" tIns="109728" bIns="109728"/>
-          <a:lstStyle/>
-          <a:p>
-            <a:pPr algn="ctr">
-              <a:spcAft>
-                <a:spcPts val="300"/>
-              </a:spcAft>
-            </a:pPr>
-            <a:r>
-              <a:rPr sz="950" b="1" i="0">
+              <a:t>Train a custom BigQuery ML logistic regression model to predict mortgage text outputs.</a:t>
+            </a:r>
+          </a:p>
+          <a:p>
+            <a:pPr>
+              <a:spcAft>
+                <a:spcPts val="800"/>
+              </a:spcAft>
+            </a:pPr>
+            <a:r>
+              <a:rPr sz="1100" b="1" i="0">
                 <a:solidFill>
                   <a:srgbClr val="1D4ED8"/>
                 </a:solidFill>
                 <a:latin typeface="Segoe UI"/>
               </a:rPr>
-              <a:t>REAL-WORLD EXAMPLE</a:t>
-            </a:r>
-          </a:p>
-          <a:p>
-            <a:r>
-              <a:rPr sz="1000" b="0" i="1">
+              <a:t>D.  </a:t>
+            </a:r>
+            <a:r>
+              <a:rPr sz="1100" b="0" i="0">
                 <a:solidFill>
                   <a:srgbClr val="3F3F46"/>
                 </a:solidFill>
                 <a:latin typeface="Segoe UI"/>
               </a:rPr>
-              <a:t>An input prompt contains toxic patterns. The Vertex AI safety layer intercepts the request, blocks execution, and returns a structured response indicating a blocked classification.</a:t>
-            </a:r>
-          </a:p>
-        </p:txBody>
-      </p:sp>
-      <p:sp>
-        <p:nvSpPr>
-          <p:cNvPr id="6" name="Rounded Rectangle 5"/>
+              <a:t>Train a student model using model distillation on Vertex AI.</a:t>
+            </a:r>
+          </a:p>
+        </p:txBody>
+      </p:sp>
+      <p:sp>
+        <p:nvSpPr>
+          <p:cNvPr id="5" name="Rounded Rectangle 4"/>
           <p:cNvSpPr/>
           <p:nvPr/>
         </p:nvSpPr>
@@ -3553,18 +3505,50 @@
                 </a:solidFill>
                 <a:latin typeface="Segoe UI"/>
               </a:rPr>
-              <a:t>MLOps Operations Loop</a:t>
-            </a:r>
-          </a:p>
-          <a:p>
-            <a:r>
-              <a:rPr sz="1150" b="0" i="0">
+              <a:t>Validation Panel</a:t>
+            </a:r>
+          </a:p>
+          <a:p>
+            <a:pPr>
+              <a:spcAft>
+                <a:spcPts val="1000"/>
+              </a:spcAft>
+            </a:pPr>
+            <a:r>
+              <a:rPr sz="1400" b="1" i="0">
+                <a:solidFill>
+                  <a:srgbClr val="047857"/>
+                </a:solidFill>
+                <a:latin typeface="Segoe UI"/>
+              </a:rPr>
+              <a:t>Correct Answer: B</a:t>
+            </a:r>
+          </a:p>
+          <a:p>
+            <a:pPr>
+              <a:spcAft>
+                <a:spcPts val="1400"/>
+              </a:spcAft>
+            </a:pPr>
+            <a:r>
+              <a:rPr sz="1100" b="0" i="0">
                 <a:solidFill>
                   <a:srgbClr val="3F3F46"/>
                 </a:solidFill>
                 <a:latin typeface="Segoe UI"/>
               </a:rPr>
-              <a:t>Deploying models in production requires active validation loops. Integrating safety checks in the prediction pipeline prevents reputation risks, toxic outputs, and jailbreak exploits.</a:t>
+              <a:t>Explanation: Retrieval-Augmented Generation (RAG) is the standard pattern to connect foundation models to dynamic, proprietary, and frequently updated external documents. It avoids the high computation cost of continuous model retraining and eliminates hallucinations by grounding the prompt with fresh retrieved context.</a:t>
+            </a:r>
+          </a:p>
+          <a:p>
+            <a:r>
+              <a:rPr sz="950" b="0" i="1">
+                <a:solidFill>
+                  <a:srgbClr val="71717A"/>
+                </a:solidFill>
+                <a:latin typeface="Segoe UI"/>
+              </a:rPr>
+              <a:t>GCP Reference: Vertex AI - RAG Overview (https://cloud.google.com/vertex-ai/docs/generative-ai/rag-overview)</a:t>
             </a:r>
           </a:p>
         </p:txBody>
@@ -3624,7 +3608,7 @@
                 </a:solidFill>
                 <a:latin typeface="Segoe UI"/>
               </a:rPr>
-              <a:t>SECURITY &amp; GOVERNANCE</a:t>
+              <a:t>PRACTICE SCENARIO 2 OF 10</a:t>
             </a:r>
           </a:p>
         </p:txBody>
@@ -3658,7 +3642,7 @@
                 </a:solidFill>
                 <a:latin typeface="Segoe UI"/>
               </a:rPr>
-              <a:t>IAM Permissions &amp; Security Governance</a:t>
+              <a:t>Hyperparameter Tuning for Diversity</a:t>
             </a:r>
           </a:p>
         </p:txBody>
@@ -3671,8 +3655,8 @@
         </p:nvSpPr>
         <p:spPr>
           <a:xfrm>
-            <a:off x="731520" y="1645920"/>
-            <a:ext cx="6217920" cy="2926080"/>
+            <a:off x="731520" y="1371600"/>
+            <a:ext cx="6217920" cy="4754880"/>
           </a:xfrm>
           <a:prstGeom prst="rect">
             <a:avLst/>
@@ -3687,179 +3671,124 @@
           <a:p>
             <a:pPr>
               <a:spcAft>
-                <a:spcPts val="1200"/>
-              </a:spcAft>
-            </a:pPr>
-            <a:r>
-              <a:rPr sz="1300" b="1" i="0">
+                <a:spcPts val="1400"/>
+              </a:spcAft>
+            </a:pPr>
+            <a:r>
+              <a:rPr sz="1200" b="1" i="0">
+                <a:solidFill>
+                  <a:srgbClr val="18181B"/>
+                </a:solidFill>
+                <a:latin typeface="Segoe UI"/>
+              </a:rPr>
+              <a:t>You are building a creative marketing copy writer application powered by Gemini 1.5 Pro. The marketing team complains that the generated ad copy is too repetitive and predictable. How should you adjust the inference hyperparameters to increase the creativity and variety of the generated text?</a:t>
+            </a:r>
+          </a:p>
+          <a:p>
+            <a:pPr>
+              <a:spcAft>
+                <a:spcPts val="800"/>
+              </a:spcAft>
+            </a:pPr>
+            <a:r>
+              <a:rPr sz="1100" b="1" i="0">
                 <a:solidFill>
                   <a:srgbClr val="1D4ED8"/>
                 </a:solidFill>
                 <a:latin typeface="Segoe UI"/>
               </a:rPr>
-              <a:t>→  </a:t>
-            </a:r>
-            <a:r>
-              <a:rPr sz="1250" b="1" i="0">
-                <a:solidFill>
-                  <a:srgbClr val="18181B"/>
-                </a:solidFill>
-                <a:latin typeface="Segoe UI"/>
-              </a:rPr>
-              <a:t>roles/aiplatform.user: </a:t>
-            </a:r>
-            <a:r>
-              <a:rPr sz="1250" b="0" i="0">
+              <a:t>A.  </a:t>
+            </a:r>
+            <a:r>
+              <a:rPr sz="1100" b="0" i="0">
                 <a:solidFill>
                   <a:srgbClr val="3F3F46"/>
                 </a:solidFill>
                 <a:latin typeface="Segoe UI"/>
               </a:rPr>
-              <a:t>Allows invoking foundation models, running predictions, and running prompt lookups.</a:t>
+              <a:t>Lower the Temperature closer to 0.0 and set Top-K to 1.</a:t>
             </a:r>
           </a:p>
           <a:p>
             <a:pPr>
               <a:spcAft>
-                <a:spcPts val="1200"/>
-              </a:spcAft>
-            </a:pPr>
-            <a:r>
-              <a:rPr sz="1300" b="1" i="0">
+                <a:spcPts val="800"/>
+              </a:spcAft>
+            </a:pPr>
+            <a:r>
+              <a:rPr sz="1100" b="1" i="0">
                 <a:solidFill>
                   <a:srgbClr val="1D4ED8"/>
                 </a:solidFill>
                 <a:latin typeface="Segoe UI"/>
               </a:rPr>
-              <a:t>→  </a:t>
-            </a:r>
-            <a:r>
-              <a:rPr sz="1250" b="1" i="0">
-                <a:solidFill>
-                  <a:srgbClr val="18181B"/>
-                </a:solidFill>
-                <a:latin typeface="Segoe UI"/>
-              </a:rPr>
-              <a:t>roles/aiplatform.admin: </a:t>
-            </a:r>
-            <a:r>
-              <a:rPr sz="1250" b="0" i="0">
+              <a:t>B.  </a:t>
+            </a:r>
+            <a:r>
+              <a:rPr sz="1100" b="0" i="0">
                 <a:solidFill>
                   <a:srgbClr val="3F3F46"/>
                 </a:solidFill>
                 <a:latin typeface="Segoe UI"/>
               </a:rPr>
-              <a:t>Allows full access to import datasets, deploy custom endpoints, and delete models.</a:t>
+              <a:t>Increase the Temperature (e.g., to 1.0 or higher) and set a higher Top-P (e.g., 0.95) to allow a wider nucleus of candidate tokens.</a:t>
             </a:r>
           </a:p>
           <a:p>
             <a:pPr>
               <a:spcAft>
-                <a:spcPts val="1200"/>
-              </a:spcAft>
-            </a:pPr>
-            <a:r>
-              <a:rPr sz="1300" b="1" i="0">
+                <a:spcPts val="800"/>
+              </a:spcAft>
+            </a:pPr>
+            <a:r>
+              <a:rPr sz="1100" b="1" i="0">
                 <a:solidFill>
                   <a:srgbClr val="1D4ED8"/>
                 </a:solidFill>
                 <a:latin typeface="Segoe UI"/>
               </a:rPr>
-              <a:t>→  </a:t>
-            </a:r>
-            <a:r>
-              <a:rPr sz="1250" b="1" i="0">
-                <a:solidFill>
-                  <a:srgbClr val="18181B"/>
-                </a:solidFill>
-                <a:latin typeface="Segoe UI"/>
-              </a:rPr>
-              <a:t>VPC Service Controls: </a:t>
-            </a:r>
-            <a:r>
-              <a:rPr sz="1250" b="0" i="0">
+              <a:t>C.  </a:t>
+            </a:r>
+            <a:r>
+              <a:rPr sz="1100" b="0" i="0">
                 <a:solidFill>
                   <a:srgbClr val="3F3F46"/>
                 </a:solidFill>
                 <a:latin typeface="Segoe UI"/>
               </a:rPr>
-              <a:t>Wraps Gemini calls in virtual security networks, blocking data extraction to external networks.</a:t>
-            </a:r>
-          </a:p>
-        </p:txBody>
-      </p:sp>
-      <p:sp>
-        <p:nvSpPr>
-          <p:cNvPr id="5" name="Rectangle 4"/>
-          <p:cNvSpPr/>
-          <p:nvPr/>
-        </p:nvSpPr>
-        <p:spPr>
-          <a:xfrm>
-            <a:off x="731520" y="4754880"/>
-            <a:ext cx="6217920" cy="1371600"/>
-          </a:xfrm>
-          <a:prstGeom prst="rect">
-            <a:avLst/>
-          </a:prstGeom>
-          <a:solidFill>
-            <a:srgbClr val="F4F4F5"/>
-          </a:solidFill>
-          <a:ln w="19050">
-            <a:solidFill>
-              <a:srgbClr val="1D4ED8"/>
-            </a:solidFill>
-          </a:ln>
-        </p:spPr>
-        <p:style>
-          <a:lnRef idx="1">
-            <a:schemeClr val="accent1"/>
-          </a:lnRef>
-          <a:fillRef idx="3">
-            <a:schemeClr val="accent1"/>
-          </a:fillRef>
-          <a:effectRef idx="2">
-            <a:schemeClr val="accent1"/>
-          </a:effectRef>
-          <a:fontRef idx="minor">
-            <a:schemeClr val="lt1"/>
-          </a:fontRef>
-        </p:style>
-        <p:txBody>
-          <a:bodyPr rtlCol="0" anchor="ctr" wrap="square" lIns="182880" rIns="182880" tIns="109728" bIns="109728"/>
-          <a:lstStyle/>
-          <a:p>
-            <a:pPr algn="ctr">
-              <a:spcAft>
-                <a:spcPts val="300"/>
-              </a:spcAft>
-            </a:pPr>
-            <a:r>
-              <a:rPr sz="950" b="1" i="0">
+              <a:t>Increase the size of the model's context window.</a:t>
+            </a:r>
+          </a:p>
+          <a:p>
+            <a:pPr>
+              <a:spcAft>
+                <a:spcPts val="800"/>
+              </a:spcAft>
+            </a:pPr>
+            <a:r>
+              <a:rPr sz="1100" b="1" i="0">
                 <a:solidFill>
                   <a:srgbClr val="1D4ED8"/>
                 </a:solidFill>
                 <a:latin typeface="Segoe UI"/>
               </a:rPr>
-              <a:t>REAL-WORLD EXAMPLE</a:t>
-            </a:r>
-          </a:p>
-          <a:p>
-            <a:r>
-              <a:rPr sz="1000" b="0" i="1">
+              <a:t>D.  </a:t>
+            </a:r>
+            <a:r>
+              <a:rPr sz="1100" b="0" i="0">
                 <a:solidFill>
                   <a:srgbClr val="3F3F46"/>
                 </a:solidFill>
                 <a:latin typeface="Segoe UI"/>
               </a:rPr>
-              <a:t>The frontend service account is granted the aiplatform.user role, enabling it to call Gemini predictions while blocking structural configuration edits.</a:t>
-            </a:r>
-          </a:p>
-        </p:txBody>
-      </p:sp>
-      <p:sp>
-        <p:nvSpPr>
-          <p:cNvPr id="6" name="Rounded Rectangle 5"/>
+              <a:t>Freeze early transformer layers and perform LoRA fine-tuning.</a:t>
+            </a:r>
+          </a:p>
+        </p:txBody>
+      </p:sp>
+      <p:sp>
+        <p:nvSpPr>
+          <p:cNvPr id="5" name="Rounded Rectangle 4"/>
           <p:cNvSpPr/>
           <p:nvPr/>
         </p:nvSpPr>
@@ -3910,18 +3839,50 @@
                 </a:solidFill>
                 <a:latin typeface="Segoe UI"/>
               </a:rPr>
-              <a:t>Security Rule</a:t>
-            </a:r>
-          </a:p>
-          <a:p>
-            <a:r>
-              <a:rPr sz="1150" b="0" i="0">
+              <a:t>Validation Panel</a:t>
+            </a:r>
+          </a:p>
+          <a:p>
+            <a:pPr>
+              <a:spcAft>
+                <a:spcPts val="1000"/>
+              </a:spcAft>
+            </a:pPr>
+            <a:r>
+              <a:rPr sz="1400" b="1" i="0">
+                <a:solidFill>
+                  <a:srgbClr val="047857"/>
+                </a:solidFill>
+                <a:latin typeface="Segoe UI"/>
+              </a:rPr>
+              <a:t>Correct Answer: B</a:t>
+            </a:r>
+          </a:p>
+          <a:p>
+            <a:pPr>
+              <a:spcAft>
+                <a:spcPts val="1400"/>
+              </a:spcAft>
+            </a:pPr>
+            <a:r>
+              <a:rPr sz="1100" b="0" i="0">
                 <a:solidFill>
                   <a:srgbClr val="3F3F46"/>
                 </a:solidFill>
                 <a:latin typeface="Segoe UI"/>
               </a:rPr>
-              <a:t>Service accounts attached to web servers must be restricted to roles/aiplatform.user to adhere to the principle of least privilege, preventing model registry access.</a:t>
+              <a:t>Explanation: Temperature scales the next-token probability distribution; higher values increase randomness (creativity). Top-P (nucleus sampling) defines the cumulative probability boundary; raising it includes a wider set of candidate tokens, increasing diversity.</a:t>
+            </a:r>
+          </a:p>
+          <a:p>
+            <a:r>
+              <a:rPr sz="950" b="0" i="1">
+                <a:solidFill>
+                  <a:srgbClr val="71717A"/>
+                </a:solidFill>
+                <a:latin typeface="Segoe UI"/>
+              </a:rPr>
+              <a:t>GCP Reference: Vertex AI - Configure Parameters (https://cloud.google.com/vertex-ai/docs/generative-ai/multimodal/configure-parameters)</a:t>
             </a:r>
           </a:p>
         </p:txBody>
@@ -3981,7 +3942,7 @@
                 </a:solidFill>
                 <a:latin typeface="Segoe UI"/>
               </a:rPr>
-              <a:t>TAKEAWAYS</a:t>
+              <a:t>PRACTICE SCENARIO 3 OF 10</a:t>
             </a:r>
           </a:p>
         </p:txBody>
@@ -4015,7 +3976,7 @@
                 </a:solidFill>
                 <a:latin typeface="Segoe UI"/>
               </a:rPr>
-              <a:t>Architect's Checklist</a:t>
+              <a:t>Content Moderation &amp; Safety Filters</a:t>
             </a:r>
           </a:p>
         </p:txBody>
@@ -4028,8 +3989,8 @@
         </p:nvSpPr>
         <p:spPr>
           <a:xfrm>
-            <a:off x="731520" y="1645920"/>
-            <a:ext cx="6217920" cy="2926080"/>
+            <a:off x="731520" y="1371600"/>
+            <a:ext cx="6217920" cy="4754880"/>
           </a:xfrm>
           <a:prstGeom prst="rect">
             <a:avLst/>
@@ -4044,213 +4005,124 @@
           <a:p>
             <a:pPr>
               <a:spcAft>
-                <a:spcPts val="1200"/>
-              </a:spcAft>
-            </a:pPr>
-            <a:r>
-              <a:rPr sz="1300" b="1" i="0">
+                <a:spcPts val="1400"/>
+              </a:spcAft>
+            </a:pPr>
+            <a:r>
+              <a:rPr sz="1200" b="1" i="0">
+                <a:solidFill>
+                  <a:srgbClr val="18181B"/>
+                </a:solidFill>
+                <a:latin typeface="Segoe UI"/>
+              </a:rPr>
+              <a:t>A healthcare booking agent powered by the Gemini API must be deployed to the public. To ensure safety compliance, the agent must not generate dangerous medical advice or respond to sexually explicit inputs. How should you configure safety filters on Vertex AI?</a:t>
+            </a:r>
+          </a:p>
+          <a:p>
+            <a:pPr>
+              <a:spcAft>
+                <a:spcPts val="800"/>
+              </a:spcAft>
+            </a:pPr>
+            <a:r>
+              <a:rPr sz="1100" b="1" i="0">
                 <a:solidFill>
                   <a:srgbClr val="1D4ED8"/>
                 </a:solidFill>
                 <a:latin typeface="Segoe UI"/>
               </a:rPr>
-              <a:t>→  </a:t>
-            </a:r>
-            <a:r>
-              <a:rPr sz="1250" b="1" i="0">
-                <a:solidFill>
-                  <a:srgbClr val="18181B"/>
-                </a:solidFill>
-                <a:latin typeface="Segoe UI"/>
-              </a:rPr>
-              <a:t>Zero-Shot/Few-Shot: </a:t>
-            </a:r>
-            <a:r>
-              <a:rPr sz="1250" b="0" i="0">
+              <a:t>A.  </a:t>
+            </a:r>
+            <a:r>
+              <a:rPr sz="1100" b="0" i="0">
                 <a:solidFill>
                   <a:srgbClr val="3F3F46"/>
                 </a:solidFill>
                 <a:latin typeface="Segoe UI"/>
               </a:rPr>
-              <a:t>First attempt prompting configurations before investing in custom parameter tuning.</a:t>
+              <a:t>Build a custom BERT classifier container in GKE to scan all outputs.</a:t>
             </a:r>
           </a:p>
           <a:p>
             <a:pPr>
               <a:spcAft>
-                <a:spcPts val="1200"/>
-              </a:spcAft>
-            </a:pPr>
-            <a:r>
-              <a:rPr sz="1300" b="1" i="0">
+                <a:spcPts val="800"/>
+              </a:spcAft>
+            </a:pPr>
+            <a:r>
+              <a:rPr sz="1100" b="1" i="0">
                 <a:solidFill>
                   <a:srgbClr val="1D4ED8"/>
                 </a:solidFill>
                 <a:latin typeface="Segoe UI"/>
               </a:rPr>
-              <a:t>→  </a:t>
-            </a:r>
-            <a:r>
-              <a:rPr sz="1250" b="1" i="0">
-                <a:solidFill>
-                  <a:srgbClr val="18181B"/>
-                </a:solidFill>
-                <a:latin typeface="Segoe UI"/>
-              </a:rPr>
-              <a:t>Retrieval-Augmented Gen: </a:t>
-            </a:r>
-            <a:r>
-              <a:rPr sz="1250" b="0" i="0">
+              <a:t>B.  </a:t>
+            </a:r>
+            <a:r>
+              <a:rPr sz="1100" b="0" i="0">
                 <a:solidFill>
                   <a:srgbClr val="3F3F46"/>
                 </a:solidFill>
                 <a:latin typeface="Segoe UI"/>
               </a:rPr>
-              <a:t>Ground models using Vector Search to mitigate hallucinations and present fresh datasets.</a:t>
+              <a:t>Configure the safetySettings block in the Gemini API request, mapping categories like HARM_CATEGORY_DANGEROUS_CONTENT to block thresholds (e.g., BLOCK_LOW_AND_ABOVE).</a:t>
             </a:r>
           </a:p>
           <a:p>
             <a:pPr>
               <a:spcAft>
-                <a:spcPts val="1200"/>
-              </a:spcAft>
-            </a:pPr>
-            <a:r>
-              <a:rPr sz="1300" b="1" i="0">
+                <a:spcPts val="800"/>
+              </a:spcAft>
+            </a:pPr>
+            <a:r>
+              <a:rPr sz="1100" b="1" i="0">
                 <a:solidFill>
                   <a:srgbClr val="1D4ED8"/>
                 </a:solidFill>
                 <a:latin typeface="Segoe UI"/>
               </a:rPr>
-              <a:t>→  </a:t>
-            </a:r>
-            <a:r>
-              <a:rPr sz="1250" b="1" i="0">
-                <a:solidFill>
-                  <a:srgbClr val="18181B"/>
-                </a:solidFill>
-                <a:latin typeface="Segoe UI"/>
-              </a:rPr>
-              <a:t>Cost/Latency: </a:t>
-            </a:r>
-            <a:r>
-              <a:rPr sz="1250" b="0" i="0">
+              <a:t>C.  </a:t>
+            </a:r>
+            <a:r>
+              <a:rPr sz="1100" b="0" i="0">
                 <a:solidFill>
                   <a:srgbClr val="3F3F46"/>
                 </a:solidFill>
                 <a:latin typeface="Segoe UI"/>
               </a:rPr>
-              <a:t>Select Gemini Flash for quick, budget serving. Reserve Pro for complex reasoning.</a:t>
+              <a:t>Wrap the model in a private VPC Service Controls perimeter.</a:t>
             </a:r>
           </a:p>
           <a:p>
             <a:pPr>
               <a:spcAft>
-                <a:spcPts val="1200"/>
-              </a:spcAft>
-            </a:pPr>
-            <a:r>
-              <a:rPr sz="1300" b="1" i="0">
+                <a:spcPts val="800"/>
+              </a:spcAft>
+            </a:pPr>
+            <a:r>
+              <a:rPr sz="1100" b="1" i="0">
                 <a:solidFill>
                   <a:srgbClr val="1D4ED8"/>
                 </a:solidFill>
                 <a:latin typeface="Segoe UI"/>
               </a:rPr>
-              <a:t>→  </a:t>
-            </a:r>
-            <a:r>
-              <a:rPr sz="1250" b="1" i="0">
-                <a:solidFill>
-                  <a:srgbClr val="18181B"/>
-                </a:solidFill>
-                <a:latin typeface="Segoe UI"/>
-              </a:rPr>
-              <a:t>Governance: </a:t>
-            </a:r>
-            <a:r>
-              <a:rPr sz="1250" b="0" i="0">
+              <a:t>D.  </a:t>
+            </a:r>
+            <a:r>
+              <a:rPr sz="1100" b="0" i="0">
                 <a:solidFill>
                   <a:srgbClr val="3F3F46"/>
                 </a:solidFill>
                 <a:latin typeface="Segoe UI"/>
               </a:rPr>
-              <a:t>Enforce IAM role boundaries and safety filter limits at the endpoint level.</a:t>
-            </a:r>
-          </a:p>
-        </p:txBody>
-      </p:sp>
-      <p:sp>
-        <p:nvSpPr>
-          <p:cNvPr id="5" name="Rectangle 4"/>
-          <p:cNvSpPr/>
-          <p:nvPr/>
-        </p:nvSpPr>
-        <p:spPr>
-          <a:xfrm>
-            <a:off x="731520" y="4754880"/>
-            <a:ext cx="6217920" cy="1371600"/>
-          </a:xfrm>
-          <a:prstGeom prst="rect">
-            <a:avLst/>
-          </a:prstGeom>
-          <a:solidFill>
-            <a:srgbClr val="F4F4F5"/>
-          </a:solidFill>
-          <a:ln w="19050">
-            <a:solidFill>
-              <a:srgbClr val="1D4ED8"/>
-            </a:solidFill>
-          </a:ln>
-        </p:spPr>
-        <p:style>
-          <a:lnRef idx="1">
-            <a:schemeClr val="accent1"/>
-          </a:lnRef>
-          <a:fillRef idx="3">
-            <a:schemeClr val="accent1"/>
-          </a:fillRef>
-          <a:effectRef idx="2">
-            <a:schemeClr val="accent1"/>
-          </a:effectRef>
-          <a:fontRef idx="minor">
-            <a:schemeClr val="lt1"/>
-          </a:fontRef>
-        </p:style>
-        <p:txBody>
-          <a:bodyPr rtlCol="0" anchor="ctr" wrap="square" lIns="182880" rIns="182880" tIns="109728" bIns="109728"/>
-          <a:lstStyle/>
-          <a:p>
-            <a:pPr algn="ctr">
-              <a:spcAft>
-                <a:spcPts val="300"/>
-              </a:spcAft>
-            </a:pPr>
-            <a:r>
-              <a:rPr sz="950" b="1" i="0">
-                <a:solidFill>
-                  <a:srgbClr val="1D4ED8"/>
-                </a:solidFill>
-                <a:latin typeface="Segoe UI"/>
-              </a:rPr>
-              <a:t>REAL-WORLD EXAMPLE</a:t>
-            </a:r>
-          </a:p>
-          <a:p>
-            <a:r>
-              <a:rPr sz="1000" b="0" i="1">
-                <a:solidFill>
-                  <a:srgbClr val="3F3F46"/>
-                </a:solidFill>
-                <a:latin typeface="Segoe UI"/>
-              </a:rPr>
-              <a:t>On the exam, if a scenario asks to connect private enterprise PDF documents with LLM outputs without model retraining, the answer is always RAG with Vector Search.</a:t>
-            </a:r>
-          </a:p>
-        </p:txBody>
-      </p:sp>
-      <p:sp>
-        <p:nvSpPr>
-          <p:cNvPr id="6" name="Rounded Rectangle 5"/>
+              <a:t>Perform supervised fine-tuning using toxic datasets.</a:t>
+            </a:r>
+          </a:p>
+        </p:txBody>
+      </p:sp>
+      <p:sp>
+        <p:nvSpPr>
+          <p:cNvPr id="5" name="Rounded Rectangle 4"/>
           <p:cNvSpPr/>
           <p:nvPr/>
         </p:nvSpPr>
@@ -4267,7 +4139,7 @@
           </a:solidFill>
           <a:ln w="15240">
             <a:solidFill>
-              <a:srgbClr val="047857"/>
+              <a:srgbClr val="D4D4D8"/>
             </a:solidFill>
           </a:ln>
         </p:spPr>
@@ -4301,18 +4173,2388 @@
                 </a:solidFill>
                 <a:latin typeface="Segoe UI"/>
               </a:rPr>
-              <a:t>Exam Tip</a:t>
-            </a:r>
-          </a:p>
-          <a:p>
-            <a:r>
-              <a:rPr sz="1150" b="0" i="0">
+              <a:t>Validation Panel</a:t>
+            </a:r>
+          </a:p>
+          <a:p>
+            <a:pPr>
+              <a:spcAft>
+                <a:spcPts val="1000"/>
+              </a:spcAft>
+            </a:pPr>
+            <a:r>
+              <a:rPr sz="1400" b="1" i="0">
+                <a:solidFill>
+                  <a:srgbClr val="047857"/>
+                </a:solidFill>
+                <a:latin typeface="Segoe UI"/>
+              </a:rPr>
+              <a:t>Correct Answer: B</a:t>
+            </a:r>
+          </a:p>
+          <a:p>
+            <a:pPr>
+              <a:spcAft>
+                <a:spcPts val="1400"/>
+              </a:spcAft>
+            </a:pPr>
+            <a:r>
+              <a:rPr sz="1100" b="0" i="0">
                 <a:solidFill>
                   <a:srgbClr val="3F3F46"/>
                 </a:solidFill>
                 <a:latin typeface="Segoe UI"/>
               </a:rPr>
-              <a:t>If the exam asks to adapt a model to proprietary, frequently changing documentation under tight budgets, **Retrieval-Augmented Generation (RAG)** is the correct choice over custom fine-tuning.</a:t>
+              <a:t>Explanation: Vertex AI provides built-in safety filters for categories like Hate Speech, Harassment, Sexually Explicit, and Dangerous Content. Developers adjust block thresholds directly in the generation config API request to catch and filter violations.</a:t>
+            </a:r>
+          </a:p>
+          <a:p>
+            <a:r>
+              <a:rPr sz="950" b="0" i="1">
+                <a:solidFill>
+                  <a:srgbClr val="71717A"/>
+                </a:solidFill>
+                <a:latin typeface="Segoe UI"/>
+              </a:rPr>
+              <a:t>GCP Reference: Vertex AI - Safety Settings (https://cloud.google.com/vertex-ai/docs/generative-ai/safety-settings)</a:t>
+            </a:r>
+          </a:p>
+        </p:txBody>
+      </p:sp>
+    </p:spTree>
+  </p:cSld>
+  <p:clrMapOvr>
+    <a:masterClrMapping/>
+  </p:clrMapOvr>
+</p:sld>
+</file>
+
+<file path=ppt/slides/slide13.xml><?xml version="1.0" encoding="utf-8"?>
+<p:sld xmlns:a="http://schemas.openxmlformats.org/drawingml/2006/main" xmlns:p="http://schemas.openxmlformats.org/presentationml/2006/main" xmlns:r="http://schemas.openxmlformats.org/officeDocument/2006/relationships">
+  <p:cSld>
+    <p:bg>
+      <p:bgPr>
+        <a:solidFill>
+          <a:srgbClr val="E4E4E6"/>
+        </a:solidFill>
+        <a:effectLst/>
+      </p:bgPr>
+    </p:bg>
+    <p:spTree>
+      <p:nvGrpSpPr>
+        <p:cNvPr id="1" name=""/>
+        <p:cNvGrpSpPr/>
+        <p:nvPr/>
+      </p:nvGrpSpPr>
+      <p:grpSpPr/>
+      <p:sp>
+        <p:nvSpPr>
+          <p:cNvPr id="2" name="TextBox 1"/>
+          <p:cNvSpPr txBox="1"/>
+          <p:nvPr/>
+        </p:nvSpPr>
+        <p:spPr>
+          <a:xfrm>
+            <a:off x="731520" y="365760"/>
+            <a:ext cx="10698480" cy="274320"/>
+          </a:xfrm>
+          <a:prstGeom prst="rect">
+            <a:avLst/>
+          </a:prstGeom>
+          <a:noFill/>
+        </p:spPr>
+        <p:txBody>
+          <a:bodyPr wrap="square" lIns="0" rIns="0" tIns="0" bIns="0">
+            <a:spAutoFit/>
+          </a:bodyPr>
+          <a:lstStyle/>
+          <a:p>
+            <a:r>
+              <a:rPr sz="1000" b="1" i="0">
+                <a:solidFill>
+                  <a:srgbClr val="1D4ED8"/>
+                </a:solidFill>
+                <a:latin typeface="Segoe UI"/>
+              </a:rPr>
+              <a:t>PRACTICE SCENARIO 4 OF 10</a:t>
+            </a:r>
+          </a:p>
+        </p:txBody>
+      </p:sp>
+      <p:sp>
+        <p:nvSpPr>
+          <p:cNvPr id="3" name="TextBox 2"/>
+          <p:cNvSpPr txBox="1"/>
+          <p:nvPr/>
+        </p:nvSpPr>
+        <p:spPr>
+          <a:xfrm>
+            <a:off x="731520" y="640080"/>
+            <a:ext cx="10698480" cy="548640"/>
+          </a:xfrm>
+          <a:prstGeom prst="rect">
+            <a:avLst/>
+          </a:prstGeom>
+          <a:noFill/>
+        </p:spPr>
+        <p:txBody>
+          <a:bodyPr wrap="square" lIns="0" rIns="0" tIns="0" bIns="0">
+            <a:spAutoFit/>
+          </a:bodyPr>
+          <a:lstStyle/>
+          <a:p>
+            <a:r>
+              <a:rPr sz="2800" b="1" i="0">
+                <a:solidFill>
+                  <a:srgbClr val="18181B"/>
+                </a:solidFill>
+                <a:latin typeface="Segoe UI"/>
+              </a:rPr>
+              <a:t>Grounding with Enterprise Search</a:t>
+            </a:r>
+          </a:p>
+        </p:txBody>
+      </p:sp>
+      <p:sp>
+        <p:nvSpPr>
+          <p:cNvPr id="4" name="TextBox 3"/>
+          <p:cNvSpPr txBox="1"/>
+          <p:nvPr/>
+        </p:nvSpPr>
+        <p:spPr>
+          <a:xfrm>
+            <a:off x="731520" y="1371600"/>
+            <a:ext cx="6217920" cy="4754880"/>
+          </a:xfrm>
+          <a:prstGeom prst="rect">
+            <a:avLst/>
+          </a:prstGeom>
+          <a:noFill/>
+        </p:spPr>
+        <p:txBody>
+          <a:bodyPr wrap="square" lIns="0" rIns="0" tIns="0" bIns="0">
+            <a:spAutoFit/>
+          </a:bodyPr>
+          <a:lstStyle/>
+          <a:p>
+            <a:pPr>
+              <a:spcAft>
+                <a:spcPts val="1400"/>
+              </a:spcAft>
+            </a:pPr>
+            <a:r>
+              <a:rPr sz="1200" b="1" i="0">
+                <a:solidFill>
+                  <a:srgbClr val="18181B"/>
+                </a:solidFill>
+                <a:latin typeface="Segoe UI"/>
+              </a:rPr>
+              <a:t>A company wants to build a search portal over thousands of internal product manuals without writing complex chunking, embedding, or database management code. Which Google Cloud service should they use?</a:t>
+            </a:r>
+          </a:p>
+          <a:p>
+            <a:pPr>
+              <a:spcAft>
+                <a:spcPts val="800"/>
+              </a:spcAft>
+            </a:pPr>
+            <a:r>
+              <a:rPr sz="1100" b="1" i="0">
+                <a:solidFill>
+                  <a:srgbClr val="1D4ED8"/>
+                </a:solidFill>
+                <a:latin typeface="Segoe UI"/>
+              </a:rPr>
+              <a:t>A.  </a:t>
+            </a:r>
+            <a:r>
+              <a:rPr sz="1100" b="0" i="0">
+                <a:solidFill>
+                  <a:srgbClr val="3F3F46"/>
+                </a:solidFill>
+                <a:latin typeface="Segoe UI"/>
+              </a:rPr>
+              <a:t>Vertex AI Custom Ingest pipelines on Dataproc.</a:t>
+            </a:r>
+          </a:p>
+          <a:p>
+            <a:pPr>
+              <a:spcAft>
+                <a:spcPts val="800"/>
+              </a:spcAft>
+            </a:pPr>
+            <a:r>
+              <a:rPr sz="1100" b="1" i="0">
+                <a:solidFill>
+                  <a:srgbClr val="1D4ED8"/>
+                </a:solidFill>
+                <a:latin typeface="Segoe UI"/>
+              </a:rPr>
+              <a:t>B.  </a:t>
+            </a:r>
+            <a:r>
+              <a:rPr sz="1100" b="0" i="0">
+                <a:solidFill>
+                  <a:srgbClr val="3F3F46"/>
+                </a:solidFill>
+                <a:latin typeface="Segoe UI"/>
+              </a:rPr>
+              <a:t>Vertex AI Agent Builder with a Data Store connected to their Cloud Storage bucket containing the manuals.</a:t>
+            </a:r>
+          </a:p>
+          <a:p>
+            <a:pPr>
+              <a:spcAft>
+                <a:spcPts val="800"/>
+              </a:spcAft>
+            </a:pPr>
+            <a:r>
+              <a:rPr sz="1100" b="1" i="0">
+                <a:solidFill>
+                  <a:srgbClr val="1D4ED8"/>
+                </a:solidFill>
+                <a:latin typeface="Segoe UI"/>
+              </a:rPr>
+              <a:t>C.  </a:t>
+            </a:r>
+            <a:r>
+              <a:rPr sz="1100" b="0" i="0">
+                <a:solidFill>
+                  <a:srgbClr val="3F3F46"/>
+                </a:solidFill>
+                <a:latin typeface="Segoe UI"/>
+              </a:rPr>
+              <a:t>BigQuery ML with external model references.</a:t>
+            </a:r>
+          </a:p>
+          <a:p>
+            <a:pPr>
+              <a:spcAft>
+                <a:spcPts val="800"/>
+              </a:spcAft>
+            </a:pPr>
+            <a:r>
+              <a:rPr sz="1100" b="1" i="0">
+                <a:solidFill>
+                  <a:srgbClr val="1D4ED8"/>
+                </a:solidFill>
+                <a:latin typeface="Segoe UI"/>
+              </a:rPr>
+              <a:t>D.  </a:t>
+            </a:r>
+            <a:r>
+              <a:rPr sz="1100" b="0" i="0">
+                <a:solidFill>
+                  <a:srgbClr val="3F3F46"/>
+                </a:solidFill>
+                <a:latin typeface="Segoe UI"/>
+              </a:rPr>
+              <a:t>Cloud Translation API connected to Pub/Sub.</a:t>
+            </a:r>
+          </a:p>
+        </p:txBody>
+      </p:sp>
+      <p:sp>
+        <p:nvSpPr>
+          <p:cNvPr id="5" name="Rounded Rectangle 4"/>
+          <p:cNvSpPr/>
+          <p:nvPr/>
+        </p:nvSpPr>
+        <p:spPr>
+          <a:xfrm>
+            <a:off x="7315200" y="1645920"/>
+            <a:ext cx="4114800" cy="4480560"/>
+          </a:xfrm>
+          <a:prstGeom prst="roundRect">
+            <a:avLst/>
+          </a:prstGeom>
+          <a:solidFill>
+            <a:srgbClr val="FFFFFF"/>
+          </a:solidFill>
+          <a:ln w="15240">
+            <a:solidFill>
+              <a:srgbClr val="D4D4D8"/>
+            </a:solidFill>
+          </a:ln>
+        </p:spPr>
+        <p:style>
+          <a:lnRef idx="1">
+            <a:schemeClr val="accent1"/>
+          </a:lnRef>
+          <a:fillRef idx="3">
+            <a:schemeClr val="accent1"/>
+          </a:fillRef>
+          <a:effectRef idx="2">
+            <a:schemeClr val="accent1"/>
+          </a:effectRef>
+          <a:fontRef idx="minor">
+            <a:schemeClr val="lt1"/>
+          </a:fontRef>
+        </p:style>
+        <p:txBody>
+          <a:bodyPr rtlCol="0" anchor="ctr" wrap="square" lIns="228600" rIns="228600" tIns="182880" bIns="182880"/>
+          <a:lstStyle/>
+          <a:p>
+            <a:pPr algn="ctr">
+              <a:spcAft>
+                <a:spcPts val="1200"/>
+              </a:spcAft>
+            </a:pPr>
+            <a:r>
+              <a:rPr sz="1600" b="1" i="0">
+                <a:solidFill>
+                  <a:srgbClr val="18181B"/>
+                </a:solidFill>
+                <a:latin typeface="Segoe UI"/>
+              </a:rPr>
+              <a:t>Validation Panel</a:t>
+            </a:r>
+          </a:p>
+          <a:p>
+            <a:pPr>
+              <a:spcAft>
+                <a:spcPts val="1000"/>
+              </a:spcAft>
+            </a:pPr>
+            <a:r>
+              <a:rPr sz="1400" b="1" i="0">
+                <a:solidFill>
+                  <a:srgbClr val="047857"/>
+                </a:solidFill>
+                <a:latin typeface="Segoe UI"/>
+              </a:rPr>
+              <a:t>Correct Answer: B</a:t>
+            </a:r>
+          </a:p>
+          <a:p>
+            <a:pPr>
+              <a:spcAft>
+                <a:spcPts val="1400"/>
+              </a:spcAft>
+            </a:pPr>
+            <a:r>
+              <a:rPr sz="1100" b="0" i="0">
+                <a:solidFill>
+                  <a:srgbClr val="3F3F46"/>
+                </a:solidFill>
+                <a:latin typeface="Segoe UI"/>
+              </a:rPr>
+              <a:t>Explanation: Vertex AI Agent Builder (specifically Enterprise Search) provides an out-of-the-box, no-code/low-code RAG system. By pointing a Data Store to a GCS bucket, the service automatically manages document ingestion, chunking, embeddings, and semantic grounding.</a:t>
+            </a:r>
+          </a:p>
+          <a:p>
+            <a:r>
+              <a:rPr sz="950" b="0" i="1">
+                <a:solidFill>
+                  <a:srgbClr val="71717A"/>
+                </a:solidFill>
+                <a:latin typeface="Segoe UI"/>
+              </a:rPr>
+              <a:t>GCP Reference: Agent Builder - Create Data Store (https://cloud.google.com/generative-ai-app-builder/docs/create-datastore-search)</a:t>
+            </a:r>
+          </a:p>
+        </p:txBody>
+      </p:sp>
+    </p:spTree>
+  </p:cSld>
+  <p:clrMapOvr>
+    <a:masterClrMapping/>
+  </p:clrMapOvr>
+</p:sld>
+</file>
+
+<file path=ppt/slides/slide14.xml><?xml version="1.0" encoding="utf-8"?>
+<p:sld xmlns:a="http://schemas.openxmlformats.org/drawingml/2006/main" xmlns:p="http://schemas.openxmlformats.org/presentationml/2006/main" xmlns:r="http://schemas.openxmlformats.org/officeDocument/2006/relationships">
+  <p:cSld>
+    <p:bg>
+      <p:bgPr>
+        <a:solidFill>
+          <a:srgbClr val="E4E4E6"/>
+        </a:solidFill>
+        <a:effectLst/>
+      </p:bgPr>
+    </p:bg>
+    <p:spTree>
+      <p:nvGrpSpPr>
+        <p:cNvPr id="1" name=""/>
+        <p:cNvGrpSpPr/>
+        <p:nvPr/>
+      </p:nvGrpSpPr>
+      <p:grpSpPr/>
+      <p:sp>
+        <p:nvSpPr>
+          <p:cNvPr id="2" name="TextBox 1"/>
+          <p:cNvSpPr txBox="1"/>
+          <p:nvPr/>
+        </p:nvSpPr>
+        <p:spPr>
+          <a:xfrm>
+            <a:off x="731520" y="365760"/>
+            <a:ext cx="10698480" cy="274320"/>
+          </a:xfrm>
+          <a:prstGeom prst="rect">
+            <a:avLst/>
+          </a:prstGeom>
+          <a:noFill/>
+        </p:spPr>
+        <p:txBody>
+          <a:bodyPr wrap="square" lIns="0" rIns="0" tIns="0" bIns="0">
+            <a:spAutoFit/>
+          </a:bodyPr>
+          <a:lstStyle/>
+          <a:p>
+            <a:r>
+              <a:rPr sz="1000" b="1" i="0">
+                <a:solidFill>
+                  <a:srgbClr val="1D4ED8"/>
+                </a:solidFill>
+                <a:latin typeface="Segoe UI"/>
+              </a:rPr>
+              <a:t>PRACTICE SCENARIO 5 OF 10</a:t>
+            </a:r>
+          </a:p>
+        </p:txBody>
+      </p:sp>
+      <p:sp>
+        <p:nvSpPr>
+          <p:cNvPr id="3" name="TextBox 2"/>
+          <p:cNvSpPr txBox="1"/>
+          <p:nvPr/>
+        </p:nvSpPr>
+        <p:spPr>
+          <a:xfrm>
+            <a:off x="731520" y="640080"/>
+            <a:ext cx="10698480" cy="548640"/>
+          </a:xfrm>
+          <a:prstGeom prst="rect">
+            <a:avLst/>
+          </a:prstGeom>
+          <a:noFill/>
+        </p:spPr>
+        <p:txBody>
+          <a:bodyPr wrap="square" lIns="0" rIns="0" tIns="0" bIns="0">
+            <a:spAutoFit/>
+          </a:bodyPr>
+          <a:lstStyle/>
+          <a:p>
+            <a:r>
+              <a:rPr sz="2800" b="1" i="0">
+                <a:solidFill>
+                  <a:srgbClr val="18181B"/>
+                </a:solidFill>
+                <a:latin typeface="Segoe UI"/>
+              </a:rPr>
+              <a:t>Parameter-Efficient Fine-Tuning</a:t>
+            </a:r>
+          </a:p>
+        </p:txBody>
+      </p:sp>
+      <p:sp>
+        <p:nvSpPr>
+          <p:cNvPr id="4" name="TextBox 3"/>
+          <p:cNvSpPr txBox="1"/>
+          <p:nvPr/>
+        </p:nvSpPr>
+        <p:spPr>
+          <a:xfrm>
+            <a:off x="731520" y="1371600"/>
+            <a:ext cx="6217920" cy="4754880"/>
+          </a:xfrm>
+          <a:prstGeom prst="rect">
+            <a:avLst/>
+          </a:prstGeom>
+          <a:noFill/>
+        </p:spPr>
+        <p:txBody>
+          <a:bodyPr wrap="square" lIns="0" rIns="0" tIns="0" bIns="0">
+            <a:spAutoFit/>
+          </a:bodyPr>
+          <a:lstStyle/>
+          <a:p>
+            <a:pPr>
+              <a:spcAft>
+                <a:spcPts val="1400"/>
+              </a:spcAft>
+            </a:pPr>
+            <a:r>
+              <a:rPr sz="1200" b="1" i="0">
+                <a:solidFill>
+                  <a:srgbClr val="18181B"/>
+                </a:solidFill>
+                <a:latin typeface="Segoe UI"/>
+              </a:rPr>
+              <a:t>You need to adapt an open-source model (such as Gemma) to output proprietary medical code formats. You have limited GPU compute budget for training. Which training methodology is recommended on Vertex AI?</a:t>
+            </a:r>
+          </a:p>
+          <a:p>
+            <a:pPr>
+              <a:spcAft>
+                <a:spcPts val="800"/>
+              </a:spcAft>
+            </a:pPr>
+            <a:r>
+              <a:rPr sz="1100" b="1" i="0">
+                <a:solidFill>
+                  <a:srgbClr val="1D4ED8"/>
+                </a:solidFill>
+                <a:latin typeface="Segoe UI"/>
+              </a:rPr>
+              <a:t>A.  </a:t>
+            </a:r>
+            <a:r>
+              <a:rPr sz="1100" b="0" i="0">
+                <a:solidFill>
+                  <a:srgbClr val="3F3F46"/>
+                </a:solidFill>
+                <a:latin typeface="Segoe UI"/>
+              </a:rPr>
+              <a:t>Full parameter fine-tuning of all 7 billion model weights.</a:t>
+            </a:r>
+          </a:p>
+          <a:p>
+            <a:pPr>
+              <a:spcAft>
+                <a:spcPts val="800"/>
+              </a:spcAft>
+            </a:pPr>
+            <a:r>
+              <a:rPr sz="1100" b="1" i="0">
+                <a:solidFill>
+                  <a:srgbClr val="1D4ED8"/>
+                </a:solidFill>
+                <a:latin typeface="Segoe UI"/>
+              </a:rPr>
+              <a:t>B.  </a:t>
+            </a:r>
+            <a:r>
+              <a:rPr sz="1100" b="0" i="0">
+                <a:solidFill>
+                  <a:srgbClr val="3F3F46"/>
+                </a:solidFill>
+                <a:latin typeface="Segoe UI"/>
+              </a:rPr>
+              <a:t>Reinforcement Learning from Human Feedback (RLHF) from scratch.</a:t>
+            </a:r>
+          </a:p>
+          <a:p>
+            <a:pPr>
+              <a:spcAft>
+                <a:spcPts val="800"/>
+              </a:spcAft>
+            </a:pPr>
+            <a:r>
+              <a:rPr sz="1100" b="1" i="0">
+                <a:solidFill>
+                  <a:srgbClr val="1D4ED8"/>
+                </a:solidFill>
+                <a:latin typeface="Segoe UI"/>
+              </a:rPr>
+              <a:t>C.  </a:t>
+            </a:r>
+            <a:r>
+              <a:rPr sz="1100" b="0" i="0">
+                <a:solidFill>
+                  <a:srgbClr val="3F3F46"/>
+                </a:solidFill>
+                <a:latin typeface="Segoe UI"/>
+              </a:rPr>
+              <a:t>Parameter-Efficient Fine-Tuning (PEFT) using Low-Rank Adaptation (LoRA) to freeze base weights and train only small adapter matrices.</a:t>
+            </a:r>
+          </a:p>
+          <a:p>
+            <a:pPr>
+              <a:spcAft>
+                <a:spcPts val="800"/>
+              </a:spcAft>
+            </a:pPr>
+            <a:r>
+              <a:rPr sz="1100" b="1" i="0">
+                <a:solidFill>
+                  <a:srgbClr val="1D4ED8"/>
+                </a:solidFill>
+                <a:latin typeface="Segoe UI"/>
+              </a:rPr>
+              <a:t>D.  </a:t>
+            </a:r>
+            <a:r>
+              <a:rPr sz="1100" b="0" i="0">
+                <a:solidFill>
+                  <a:srgbClr val="3F3F46"/>
+                </a:solidFill>
+                <a:latin typeface="Segoe UI"/>
+              </a:rPr>
+              <a:t>Unsupervised pre-training on medical databases.</a:t>
+            </a:r>
+          </a:p>
+        </p:txBody>
+      </p:sp>
+      <p:sp>
+        <p:nvSpPr>
+          <p:cNvPr id="5" name="Rounded Rectangle 4"/>
+          <p:cNvSpPr/>
+          <p:nvPr/>
+        </p:nvSpPr>
+        <p:spPr>
+          <a:xfrm>
+            <a:off x="7315200" y="1645920"/>
+            <a:ext cx="4114800" cy="4480560"/>
+          </a:xfrm>
+          <a:prstGeom prst="roundRect">
+            <a:avLst/>
+          </a:prstGeom>
+          <a:solidFill>
+            <a:srgbClr val="FFFFFF"/>
+          </a:solidFill>
+          <a:ln w="15240">
+            <a:solidFill>
+              <a:srgbClr val="D4D4D8"/>
+            </a:solidFill>
+          </a:ln>
+        </p:spPr>
+        <p:style>
+          <a:lnRef idx="1">
+            <a:schemeClr val="accent1"/>
+          </a:lnRef>
+          <a:fillRef idx="3">
+            <a:schemeClr val="accent1"/>
+          </a:fillRef>
+          <a:effectRef idx="2">
+            <a:schemeClr val="accent1"/>
+          </a:effectRef>
+          <a:fontRef idx="minor">
+            <a:schemeClr val="lt1"/>
+          </a:fontRef>
+        </p:style>
+        <p:txBody>
+          <a:bodyPr rtlCol="0" anchor="ctr" wrap="square" lIns="228600" rIns="228600" tIns="182880" bIns="182880"/>
+          <a:lstStyle/>
+          <a:p>
+            <a:pPr algn="ctr">
+              <a:spcAft>
+                <a:spcPts val="1200"/>
+              </a:spcAft>
+            </a:pPr>
+            <a:r>
+              <a:rPr sz="1600" b="1" i="0">
+                <a:solidFill>
+                  <a:srgbClr val="18181B"/>
+                </a:solidFill>
+                <a:latin typeface="Segoe UI"/>
+              </a:rPr>
+              <a:t>Validation Panel</a:t>
+            </a:r>
+          </a:p>
+          <a:p>
+            <a:pPr>
+              <a:spcAft>
+                <a:spcPts val="1000"/>
+              </a:spcAft>
+            </a:pPr>
+            <a:r>
+              <a:rPr sz="1400" b="1" i="0">
+                <a:solidFill>
+                  <a:srgbClr val="047857"/>
+                </a:solidFill>
+                <a:latin typeface="Segoe UI"/>
+              </a:rPr>
+              <a:t>Correct Answer: C</a:t>
+            </a:r>
+          </a:p>
+          <a:p>
+            <a:pPr>
+              <a:spcAft>
+                <a:spcPts val="1400"/>
+              </a:spcAft>
+            </a:pPr>
+            <a:r>
+              <a:rPr sz="1100" b="0" i="0">
+                <a:solidFill>
+                  <a:srgbClr val="3F3F46"/>
+                </a:solidFill>
+                <a:latin typeface="Segoe UI"/>
+              </a:rPr>
+              <a:t>Explanation: PEFT/LoRA freezes the pre-trained model parameters and introduces small, trainable rank decomposition matrices. This dramatically reduces GPU memory requirements and training times, making custom domain training highly cost-efficient.</a:t>
+            </a:r>
+          </a:p>
+          <a:p>
+            <a:r>
+              <a:rPr sz="950" b="0" i="1">
+                <a:solidFill>
+                  <a:srgbClr val="71717A"/>
+                </a:solidFill>
+                <a:latin typeface="Segoe UI"/>
+              </a:rPr>
+              <a:t>GCP Reference: Vertex AI - Tuning Overview (https://cloud.google.com/vertex-ai/docs/generative-ai/tuning/tuning-overview)</a:t>
+            </a:r>
+          </a:p>
+        </p:txBody>
+      </p:sp>
+    </p:spTree>
+  </p:cSld>
+  <p:clrMapOvr>
+    <a:masterClrMapping/>
+  </p:clrMapOvr>
+</p:sld>
+</file>
+
+<file path=ppt/slides/slide15.xml><?xml version="1.0" encoding="utf-8"?>
+<p:sld xmlns:a="http://schemas.openxmlformats.org/drawingml/2006/main" xmlns:p="http://schemas.openxmlformats.org/presentationml/2006/main" xmlns:r="http://schemas.openxmlformats.org/officeDocument/2006/relationships">
+  <p:cSld>
+    <p:bg>
+      <p:bgPr>
+        <a:solidFill>
+          <a:srgbClr val="E4E4E6"/>
+        </a:solidFill>
+        <a:effectLst/>
+      </p:bgPr>
+    </p:bg>
+    <p:spTree>
+      <p:nvGrpSpPr>
+        <p:cNvPr id="1" name=""/>
+        <p:cNvGrpSpPr/>
+        <p:nvPr/>
+      </p:nvGrpSpPr>
+      <p:grpSpPr/>
+      <p:sp>
+        <p:nvSpPr>
+          <p:cNvPr id="2" name="TextBox 1"/>
+          <p:cNvSpPr txBox="1"/>
+          <p:nvPr/>
+        </p:nvSpPr>
+        <p:spPr>
+          <a:xfrm>
+            <a:off x="731520" y="365760"/>
+            <a:ext cx="10698480" cy="274320"/>
+          </a:xfrm>
+          <a:prstGeom prst="rect">
+            <a:avLst/>
+          </a:prstGeom>
+          <a:noFill/>
+        </p:spPr>
+        <p:txBody>
+          <a:bodyPr wrap="square" lIns="0" rIns="0" tIns="0" bIns="0">
+            <a:spAutoFit/>
+          </a:bodyPr>
+          <a:lstStyle/>
+          <a:p>
+            <a:r>
+              <a:rPr sz="1000" b="1" i="0">
+                <a:solidFill>
+                  <a:srgbClr val="1D4ED8"/>
+                </a:solidFill>
+                <a:latin typeface="Segoe UI"/>
+              </a:rPr>
+              <a:t>PRACTICE SCENARIO 6 OF 10</a:t>
+            </a:r>
+          </a:p>
+        </p:txBody>
+      </p:sp>
+      <p:sp>
+        <p:nvSpPr>
+          <p:cNvPr id="3" name="TextBox 2"/>
+          <p:cNvSpPr txBox="1"/>
+          <p:nvPr/>
+        </p:nvSpPr>
+        <p:spPr>
+          <a:xfrm>
+            <a:off x="731520" y="640080"/>
+            <a:ext cx="10698480" cy="548640"/>
+          </a:xfrm>
+          <a:prstGeom prst="rect">
+            <a:avLst/>
+          </a:prstGeom>
+          <a:noFill/>
+        </p:spPr>
+        <p:txBody>
+          <a:bodyPr wrap="square" lIns="0" rIns="0" tIns="0" bIns="0">
+            <a:spAutoFit/>
+          </a:bodyPr>
+          <a:lstStyle/>
+          <a:p>
+            <a:r>
+              <a:rPr sz="2800" b="1" i="0">
+                <a:solidFill>
+                  <a:srgbClr val="18181B"/>
+                </a:solidFill>
+                <a:latin typeface="Segoe UI"/>
+              </a:rPr>
+              <a:t>Model Distillation</a:t>
+            </a:r>
+          </a:p>
+        </p:txBody>
+      </p:sp>
+      <p:sp>
+        <p:nvSpPr>
+          <p:cNvPr id="4" name="TextBox 3"/>
+          <p:cNvSpPr txBox="1"/>
+          <p:nvPr/>
+        </p:nvSpPr>
+        <p:spPr>
+          <a:xfrm>
+            <a:off x="731520" y="1371600"/>
+            <a:ext cx="6217920" cy="4754880"/>
+          </a:xfrm>
+          <a:prstGeom prst="rect">
+            <a:avLst/>
+          </a:prstGeom>
+          <a:noFill/>
+        </p:spPr>
+        <p:txBody>
+          <a:bodyPr wrap="square" lIns="0" rIns="0" tIns="0" bIns="0">
+            <a:spAutoFit/>
+          </a:bodyPr>
+          <a:lstStyle/>
+          <a:p>
+            <a:pPr>
+              <a:spcAft>
+                <a:spcPts val="1400"/>
+              </a:spcAft>
+            </a:pPr>
+            <a:r>
+              <a:rPr sz="1200" b="1" i="0">
+                <a:solidFill>
+                  <a:srgbClr val="18181B"/>
+                </a:solidFill>
+                <a:latin typeface="Segoe UI"/>
+              </a:rPr>
+              <a:t>An automotive company wants to run a natural language voice assistant inside cars. The hardware in the car has severe memory and processing limits and cannot host a large model. However, the assistant must mimic the reasoning quality of Gemini 1.5 Pro. How can Vertex AI solve this?</a:t>
+            </a:r>
+          </a:p>
+          <a:p>
+            <a:pPr>
+              <a:spcAft>
+                <a:spcPts val="800"/>
+              </a:spcAft>
+            </a:pPr>
+            <a:r>
+              <a:rPr sz="1100" b="1" i="0">
+                <a:solidFill>
+                  <a:srgbClr val="1D4ED8"/>
+                </a:solidFill>
+                <a:latin typeface="Segoe UI"/>
+              </a:rPr>
+              <a:t>A.  </a:t>
+            </a:r>
+            <a:r>
+              <a:rPr sz="1100" b="0" i="0">
+                <a:solidFill>
+                  <a:srgbClr val="3F3F46"/>
+                </a:solidFill>
+                <a:latin typeface="Segoe UI"/>
+              </a:rPr>
+              <a:t>Set up a high-performance TPU cluster inside the car dashboard.</a:t>
+            </a:r>
+          </a:p>
+          <a:p>
+            <a:pPr>
+              <a:spcAft>
+                <a:spcPts val="800"/>
+              </a:spcAft>
+            </a:pPr>
+            <a:r>
+              <a:rPr sz="1100" b="1" i="0">
+                <a:solidFill>
+                  <a:srgbClr val="1D4ED8"/>
+                </a:solidFill>
+                <a:latin typeface="Segoe UI"/>
+              </a:rPr>
+              <a:t>B.  </a:t>
+            </a:r>
+            <a:r>
+              <a:rPr sz="1100" b="0" i="0">
+                <a:solidFill>
+                  <a:srgbClr val="3F3F46"/>
+                </a:solidFill>
+                <a:latin typeface="Segoe UI"/>
+              </a:rPr>
+              <a:t>Execute a Model Distillation job on Vertex AI, using Gemini 1.5 Pro as the teacher to train a small, compact student model (like Gemma 2B) for edge deployment.</a:t>
+            </a:r>
+          </a:p>
+          <a:p>
+            <a:pPr>
+              <a:spcAft>
+                <a:spcPts val="800"/>
+              </a:spcAft>
+            </a:pPr>
+            <a:r>
+              <a:rPr sz="1100" b="1" i="0">
+                <a:solidFill>
+                  <a:srgbClr val="1D4ED8"/>
+                </a:solidFill>
+                <a:latin typeface="Segoe UI"/>
+              </a:rPr>
+              <a:t>C.  </a:t>
+            </a:r>
+            <a:r>
+              <a:rPr sz="1100" b="0" i="0">
+                <a:solidFill>
+                  <a:srgbClr val="3F3F46"/>
+                </a:solidFill>
+                <a:latin typeface="Segoe UI"/>
+              </a:rPr>
+              <a:t>Deploy a gRPC API connection requiring active satellite cellular networks.</a:t>
+            </a:r>
+          </a:p>
+          <a:p>
+            <a:pPr>
+              <a:spcAft>
+                <a:spcPts val="800"/>
+              </a:spcAft>
+            </a:pPr>
+            <a:r>
+              <a:rPr sz="1100" b="1" i="0">
+                <a:solidFill>
+                  <a:srgbClr val="1D4ED8"/>
+                </a:solidFill>
+                <a:latin typeface="Segoe UI"/>
+              </a:rPr>
+              <a:t>D.  </a:t>
+            </a:r>
+            <a:r>
+              <a:rPr sz="1100" b="0" i="0">
+                <a:solidFill>
+                  <a:srgbClr val="3F3F46"/>
+                </a:solidFill>
+                <a:latin typeface="Segoe UI"/>
+              </a:rPr>
+              <a:t>Convert the model weights to TF Lite format without retraining.</a:t>
+            </a:r>
+          </a:p>
+        </p:txBody>
+      </p:sp>
+      <p:sp>
+        <p:nvSpPr>
+          <p:cNvPr id="5" name="Rounded Rectangle 4"/>
+          <p:cNvSpPr/>
+          <p:nvPr/>
+        </p:nvSpPr>
+        <p:spPr>
+          <a:xfrm>
+            <a:off x="7315200" y="1645920"/>
+            <a:ext cx="4114800" cy="4480560"/>
+          </a:xfrm>
+          <a:prstGeom prst="roundRect">
+            <a:avLst/>
+          </a:prstGeom>
+          <a:solidFill>
+            <a:srgbClr val="FFFFFF"/>
+          </a:solidFill>
+          <a:ln w="15240">
+            <a:solidFill>
+              <a:srgbClr val="D4D4D8"/>
+            </a:solidFill>
+          </a:ln>
+        </p:spPr>
+        <p:style>
+          <a:lnRef idx="1">
+            <a:schemeClr val="accent1"/>
+          </a:lnRef>
+          <a:fillRef idx="3">
+            <a:schemeClr val="accent1"/>
+          </a:fillRef>
+          <a:effectRef idx="2">
+            <a:schemeClr val="accent1"/>
+          </a:effectRef>
+          <a:fontRef idx="minor">
+            <a:schemeClr val="lt1"/>
+          </a:fontRef>
+        </p:style>
+        <p:txBody>
+          <a:bodyPr rtlCol="0" anchor="ctr" wrap="square" lIns="228600" rIns="228600" tIns="182880" bIns="182880"/>
+          <a:lstStyle/>
+          <a:p>
+            <a:pPr algn="ctr">
+              <a:spcAft>
+                <a:spcPts val="1200"/>
+              </a:spcAft>
+            </a:pPr>
+            <a:r>
+              <a:rPr sz="1600" b="1" i="0">
+                <a:solidFill>
+                  <a:srgbClr val="18181B"/>
+                </a:solidFill>
+                <a:latin typeface="Segoe UI"/>
+              </a:rPr>
+              <a:t>Validation Panel</a:t>
+            </a:r>
+          </a:p>
+          <a:p>
+            <a:pPr>
+              <a:spcAft>
+                <a:spcPts val="1000"/>
+              </a:spcAft>
+            </a:pPr>
+            <a:r>
+              <a:rPr sz="1400" b="1" i="0">
+                <a:solidFill>
+                  <a:srgbClr val="047857"/>
+                </a:solidFill>
+                <a:latin typeface="Segoe UI"/>
+              </a:rPr>
+              <a:t>Correct Answer: B</a:t>
+            </a:r>
+          </a:p>
+          <a:p>
+            <a:pPr>
+              <a:spcAft>
+                <a:spcPts val="1400"/>
+              </a:spcAft>
+            </a:pPr>
+            <a:r>
+              <a:rPr sz="1100" b="0" i="0">
+                <a:solidFill>
+                  <a:srgbClr val="3F3F46"/>
+                </a:solidFill>
+                <a:latin typeface="Segoe UI"/>
+              </a:rPr>
+              <a:t>Explanation: Model distillation on Vertex AI uses a large, high-capability teacher model to train a smaller student model. The student model learns to approximate the teacher's outputs, enabling lightweight, low-latency deployments that retain high reasoning quality.</a:t>
+            </a:r>
+          </a:p>
+          <a:p>
+            <a:r>
+              <a:rPr sz="950" b="0" i="1">
+                <a:solidFill>
+                  <a:srgbClr val="71717A"/>
+                </a:solidFill>
+                <a:latin typeface="Segoe UI"/>
+              </a:rPr>
+              <a:t>GCP Reference: Vertex AI - Model Distillation (https://cloud.google.com/vertex-ai/docs/generative-ai/models/distill-model)</a:t>
+            </a:r>
+          </a:p>
+        </p:txBody>
+      </p:sp>
+    </p:spTree>
+  </p:cSld>
+  <p:clrMapOvr>
+    <a:masterClrMapping/>
+  </p:clrMapOvr>
+</p:sld>
+</file>
+
+<file path=ppt/slides/slide16.xml><?xml version="1.0" encoding="utf-8"?>
+<p:sld xmlns:a="http://schemas.openxmlformats.org/drawingml/2006/main" xmlns:p="http://schemas.openxmlformats.org/presentationml/2006/main" xmlns:r="http://schemas.openxmlformats.org/officeDocument/2006/relationships">
+  <p:cSld>
+    <p:bg>
+      <p:bgPr>
+        <a:solidFill>
+          <a:srgbClr val="E4E4E6"/>
+        </a:solidFill>
+        <a:effectLst/>
+      </p:bgPr>
+    </p:bg>
+    <p:spTree>
+      <p:nvGrpSpPr>
+        <p:cNvPr id="1" name=""/>
+        <p:cNvGrpSpPr/>
+        <p:nvPr/>
+      </p:nvGrpSpPr>
+      <p:grpSpPr/>
+      <p:sp>
+        <p:nvSpPr>
+          <p:cNvPr id="2" name="TextBox 1"/>
+          <p:cNvSpPr txBox="1"/>
+          <p:nvPr/>
+        </p:nvSpPr>
+        <p:spPr>
+          <a:xfrm>
+            <a:off x="731520" y="365760"/>
+            <a:ext cx="10698480" cy="274320"/>
+          </a:xfrm>
+          <a:prstGeom prst="rect">
+            <a:avLst/>
+          </a:prstGeom>
+          <a:noFill/>
+        </p:spPr>
+        <p:txBody>
+          <a:bodyPr wrap="square" lIns="0" rIns="0" tIns="0" bIns="0">
+            <a:spAutoFit/>
+          </a:bodyPr>
+          <a:lstStyle/>
+          <a:p>
+            <a:r>
+              <a:rPr sz="1000" b="1" i="0">
+                <a:solidFill>
+                  <a:srgbClr val="1D4ED8"/>
+                </a:solidFill>
+                <a:latin typeface="Segoe UI"/>
+              </a:rPr>
+              <a:t>PRACTICE SCENARIO 7 OF 10</a:t>
+            </a:r>
+          </a:p>
+        </p:txBody>
+      </p:sp>
+      <p:sp>
+        <p:nvSpPr>
+          <p:cNvPr id="3" name="TextBox 2"/>
+          <p:cNvSpPr txBox="1"/>
+          <p:nvPr/>
+        </p:nvSpPr>
+        <p:spPr>
+          <a:xfrm>
+            <a:off x="731520" y="640080"/>
+            <a:ext cx="10698480" cy="548640"/>
+          </a:xfrm>
+          <a:prstGeom prst="rect">
+            <a:avLst/>
+          </a:prstGeom>
+          <a:noFill/>
+        </p:spPr>
+        <p:txBody>
+          <a:bodyPr wrap="square" lIns="0" rIns="0" tIns="0" bIns="0">
+            <a:spAutoFit/>
+          </a:bodyPr>
+          <a:lstStyle/>
+          <a:p>
+            <a:r>
+              <a:rPr sz="2800" b="1" i="0">
+                <a:solidFill>
+                  <a:srgbClr val="18181B"/>
+                </a:solidFill>
+                <a:latin typeface="Segoe UI"/>
+              </a:rPr>
+              <a:t>Enforcing Structured JSON Outputs</a:t>
+            </a:r>
+          </a:p>
+        </p:txBody>
+      </p:sp>
+      <p:sp>
+        <p:nvSpPr>
+          <p:cNvPr id="4" name="TextBox 3"/>
+          <p:cNvSpPr txBox="1"/>
+          <p:nvPr/>
+        </p:nvSpPr>
+        <p:spPr>
+          <a:xfrm>
+            <a:off x="731520" y="1371600"/>
+            <a:ext cx="6217920" cy="4754880"/>
+          </a:xfrm>
+          <a:prstGeom prst="rect">
+            <a:avLst/>
+          </a:prstGeom>
+          <a:noFill/>
+        </p:spPr>
+        <p:txBody>
+          <a:bodyPr wrap="square" lIns="0" rIns="0" tIns="0" bIns="0">
+            <a:spAutoFit/>
+          </a:bodyPr>
+          <a:lstStyle/>
+          <a:p>
+            <a:pPr>
+              <a:spcAft>
+                <a:spcPts val="1400"/>
+              </a:spcAft>
+            </a:pPr>
+            <a:r>
+              <a:rPr sz="1200" b="1" i="0">
+                <a:solidFill>
+                  <a:srgbClr val="18181B"/>
+                </a:solidFill>
+                <a:latin typeface="Segoe UI"/>
+              </a:rPr>
+              <a:t>A travel booking app uses Gemini to extract flight details (origin, destination, departure date) from customer emails. The extracted data must be fed into a legacy database that strictly accepts only valid JSON matching a specific schema. How should you invoke the Gemini API?</a:t>
+            </a:r>
+          </a:p>
+          <a:p>
+            <a:pPr>
+              <a:spcAft>
+                <a:spcPts val="800"/>
+              </a:spcAft>
+            </a:pPr>
+            <a:r>
+              <a:rPr sz="1100" b="1" i="0">
+                <a:solidFill>
+                  <a:srgbClr val="1D4ED8"/>
+                </a:solidFill>
+                <a:latin typeface="Segoe UI"/>
+              </a:rPr>
+              <a:t>A.  </a:t>
+            </a:r>
+            <a:r>
+              <a:rPr sz="1100" b="0" i="0">
+                <a:solidFill>
+                  <a:srgbClr val="3F3F46"/>
+                </a:solidFill>
+                <a:latin typeface="Segoe UI"/>
+              </a:rPr>
+              <a:t>Instruct the model in the prompt to write JSON and write a regex parser to fix errors.</a:t>
+            </a:r>
+          </a:p>
+          <a:p>
+            <a:pPr>
+              <a:spcAft>
+                <a:spcPts val="800"/>
+              </a:spcAft>
+            </a:pPr>
+            <a:r>
+              <a:rPr sz="1100" b="1" i="0">
+                <a:solidFill>
+                  <a:srgbClr val="1D4ED8"/>
+                </a:solidFill>
+                <a:latin typeface="Segoe UI"/>
+              </a:rPr>
+              <a:t>B.  </a:t>
+            </a:r>
+            <a:r>
+              <a:rPr sz="1100" b="0" i="0">
+                <a:solidFill>
+                  <a:srgbClr val="3F3F46"/>
+                </a:solidFill>
+                <a:latin typeface="Segoe UI"/>
+              </a:rPr>
+              <a:t>Use supervised fine-tuning to teach the model JSON syntax.</a:t>
+            </a:r>
+          </a:p>
+          <a:p>
+            <a:pPr>
+              <a:spcAft>
+                <a:spcPts val="800"/>
+              </a:spcAft>
+            </a:pPr>
+            <a:r>
+              <a:rPr sz="1100" b="1" i="0">
+                <a:solidFill>
+                  <a:srgbClr val="1D4ED8"/>
+                </a:solidFill>
+                <a:latin typeface="Segoe UI"/>
+              </a:rPr>
+              <a:t>C.  </a:t>
+            </a:r>
+            <a:r>
+              <a:rPr sz="1100" b="0" i="0">
+                <a:solidFill>
+                  <a:srgbClr val="3F3F46"/>
+                </a:solidFill>
+                <a:latin typeface="Segoe UI"/>
+              </a:rPr>
+              <a:t>Define a JSON schema using OpenAPI standards and pass it as the responseSchema configuration parameter in the generation config.</a:t>
+            </a:r>
+          </a:p>
+          <a:p>
+            <a:pPr>
+              <a:spcAft>
+                <a:spcPts val="800"/>
+              </a:spcAft>
+            </a:pPr>
+            <a:r>
+              <a:rPr sz="1100" b="1" i="0">
+                <a:solidFill>
+                  <a:srgbClr val="1D4ED8"/>
+                </a:solidFill>
+                <a:latin typeface="Segoe UI"/>
+              </a:rPr>
+              <a:t>D.  </a:t>
+            </a:r>
+            <a:r>
+              <a:rPr sz="1100" b="0" i="0">
+                <a:solidFill>
+                  <a:srgbClr val="3F3F46"/>
+                </a:solidFill>
+                <a:latin typeface="Segoe UI"/>
+              </a:rPr>
+              <a:t>Call Document AI Form Parser before prompting the model.</a:t>
+            </a:r>
+          </a:p>
+        </p:txBody>
+      </p:sp>
+      <p:sp>
+        <p:nvSpPr>
+          <p:cNvPr id="5" name="Rounded Rectangle 4"/>
+          <p:cNvSpPr/>
+          <p:nvPr/>
+        </p:nvSpPr>
+        <p:spPr>
+          <a:xfrm>
+            <a:off x="7315200" y="1645920"/>
+            <a:ext cx="4114800" cy="4480560"/>
+          </a:xfrm>
+          <a:prstGeom prst="roundRect">
+            <a:avLst/>
+          </a:prstGeom>
+          <a:solidFill>
+            <a:srgbClr val="FFFFFF"/>
+          </a:solidFill>
+          <a:ln w="15240">
+            <a:solidFill>
+              <a:srgbClr val="D4D4D8"/>
+            </a:solidFill>
+          </a:ln>
+        </p:spPr>
+        <p:style>
+          <a:lnRef idx="1">
+            <a:schemeClr val="accent1"/>
+          </a:lnRef>
+          <a:fillRef idx="3">
+            <a:schemeClr val="accent1"/>
+          </a:fillRef>
+          <a:effectRef idx="2">
+            <a:schemeClr val="accent1"/>
+          </a:effectRef>
+          <a:fontRef idx="minor">
+            <a:schemeClr val="lt1"/>
+          </a:fontRef>
+        </p:style>
+        <p:txBody>
+          <a:bodyPr rtlCol="0" anchor="ctr" wrap="square" lIns="228600" rIns="228600" tIns="182880" bIns="182880"/>
+          <a:lstStyle/>
+          <a:p>
+            <a:pPr algn="ctr">
+              <a:spcAft>
+                <a:spcPts val="1200"/>
+              </a:spcAft>
+            </a:pPr>
+            <a:r>
+              <a:rPr sz="1600" b="1" i="0">
+                <a:solidFill>
+                  <a:srgbClr val="18181B"/>
+                </a:solidFill>
+                <a:latin typeface="Segoe UI"/>
+              </a:rPr>
+              <a:t>Validation Panel</a:t>
+            </a:r>
+          </a:p>
+          <a:p>
+            <a:pPr>
+              <a:spcAft>
+                <a:spcPts val="1000"/>
+              </a:spcAft>
+            </a:pPr>
+            <a:r>
+              <a:rPr sz="1400" b="1" i="0">
+                <a:solidFill>
+                  <a:srgbClr val="047857"/>
+                </a:solidFill>
+                <a:latin typeface="Segoe UI"/>
+              </a:rPr>
+              <a:t>Correct Answer: C</a:t>
+            </a:r>
+          </a:p>
+          <a:p>
+            <a:pPr>
+              <a:spcAft>
+                <a:spcPts val="1400"/>
+              </a:spcAft>
+            </a:pPr>
+            <a:r>
+              <a:rPr sz="1100" b="0" i="0">
+                <a:solidFill>
+                  <a:srgbClr val="3F3F46"/>
+                </a:solidFill>
+                <a:latin typeface="Segoe UI"/>
+              </a:rPr>
+              <a:t>Explanation: The Gemini API supports schema enforcement. By passing an OpenAPI schema in responseSchema (and setting responseMimeType to application/json), the model is constrained to generate outputs that strictly comply with the target JSON structure, preventing parser errors.</a:t>
+            </a:r>
+          </a:p>
+          <a:p>
+            <a:r>
+              <a:rPr sz="950" b="0" i="1">
+                <a:solidFill>
+                  <a:srgbClr val="71717A"/>
+                </a:solidFill>
+                <a:latin typeface="Segoe UI"/>
+              </a:rPr>
+              <a:t>GCP Reference: Vertex AI - Enforcing Schema (https://cloud.google.com/vertex-ai/docs/generative-ai/multimodal/control-structured-output)</a:t>
+            </a:r>
+          </a:p>
+        </p:txBody>
+      </p:sp>
+    </p:spTree>
+  </p:cSld>
+  <p:clrMapOvr>
+    <a:masterClrMapping/>
+  </p:clrMapOvr>
+</p:sld>
+</file>
+
+<file path=ppt/slides/slide17.xml><?xml version="1.0" encoding="utf-8"?>
+<p:sld xmlns:a="http://schemas.openxmlformats.org/drawingml/2006/main" xmlns:p="http://schemas.openxmlformats.org/presentationml/2006/main" xmlns:r="http://schemas.openxmlformats.org/officeDocument/2006/relationships">
+  <p:cSld>
+    <p:bg>
+      <p:bgPr>
+        <a:solidFill>
+          <a:srgbClr val="E4E4E6"/>
+        </a:solidFill>
+        <a:effectLst/>
+      </p:bgPr>
+    </p:bg>
+    <p:spTree>
+      <p:nvGrpSpPr>
+        <p:cNvPr id="1" name=""/>
+        <p:cNvGrpSpPr/>
+        <p:nvPr/>
+      </p:nvGrpSpPr>
+      <p:grpSpPr/>
+      <p:sp>
+        <p:nvSpPr>
+          <p:cNvPr id="2" name="TextBox 1"/>
+          <p:cNvSpPr txBox="1"/>
+          <p:nvPr/>
+        </p:nvSpPr>
+        <p:spPr>
+          <a:xfrm>
+            <a:off x="731520" y="365760"/>
+            <a:ext cx="10698480" cy="274320"/>
+          </a:xfrm>
+          <a:prstGeom prst="rect">
+            <a:avLst/>
+          </a:prstGeom>
+          <a:noFill/>
+        </p:spPr>
+        <p:txBody>
+          <a:bodyPr wrap="square" lIns="0" rIns="0" tIns="0" bIns="0">
+            <a:spAutoFit/>
+          </a:bodyPr>
+          <a:lstStyle/>
+          <a:p>
+            <a:r>
+              <a:rPr sz="1000" b="1" i="0">
+                <a:solidFill>
+                  <a:srgbClr val="1D4ED8"/>
+                </a:solidFill>
+                <a:latin typeface="Segoe UI"/>
+              </a:rPr>
+              <a:t>PRACTICE SCENARIO 8 OF 10</a:t>
+            </a:r>
+          </a:p>
+        </p:txBody>
+      </p:sp>
+      <p:sp>
+        <p:nvSpPr>
+          <p:cNvPr id="3" name="TextBox 2"/>
+          <p:cNvSpPr txBox="1"/>
+          <p:nvPr/>
+        </p:nvSpPr>
+        <p:spPr>
+          <a:xfrm>
+            <a:off x="731520" y="640080"/>
+            <a:ext cx="10698480" cy="548640"/>
+          </a:xfrm>
+          <a:prstGeom prst="rect">
+            <a:avLst/>
+          </a:prstGeom>
+          <a:noFill/>
+        </p:spPr>
+        <p:txBody>
+          <a:bodyPr wrap="square" lIns="0" rIns="0" tIns="0" bIns="0">
+            <a:spAutoFit/>
+          </a:bodyPr>
+          <a:lstStyle/>
+          <a:p>
+            <a:r>
+              <a:rPr sz="2800" b="1" i="0">
+                <a:solidFill>
+                  <a:srgbClr val="18181B"/>
+                </a:solidFill>
+                <a:latin typeface="Segoe UI"/>
+              </a:rPr>
+              <a:t>IAM Permissions for Prompt Design</a:t>
+            </a:r>
+          </a:p>
+        </p:txBody>
+      </p:sp>
+      <p:sp>
+        <p:nvSpPr>
+          <p:cNvPr id="4" name="TextBox 3"/>
+          <p:cNvSpPr txBox="1"/>
+          <p:nvPr/>
+        </p:nvSpPr>
+        <p:spPr>
+          <a:xfrm>
+            <a:off x="731520" y="1371600"/>
+            <a:ext cx="6217920" cy="4754880"/>
+          </a:xfrm>
+          <a:prstGeom prst="rect">
+            <a:avLst/>
+          </a:prstGeom>
+          <a:noFill/>
+        </p:spPr>
+        <p:txBody>
+          <a:bodyPr wrap="square" lIns="0" rIns="0" tIns="0" bIns="0">
+            <a:spAutoFit/>
+          </a:bodyPr>
+          <a:lstStyle/>
+          <a:p>
+            <a:pPr>
+              <a:spcAft>
+                <a:spcPts val="1400"/>
+              </a:spcAft>
+            </a:pPr>
+            <a:r>
+              <a:rPr sz="1200" b="1" i="0">
+                <a:solidFill>
+                  <a:srgbClr val="18181B"/>
+                </a:solidFill>
+                <a:latin typeface="Segoe UI"/>
+              </a:rPr>
+              <a:t>An external contractor joins your team to help prototype prompts and system instructions inside Vertex AI Studio. The contractor should not be able to train custom models, deploy endpoints, or access production billing. What IAM role is appropriate?</a:t>
+            </a:r>
+          </a:p>
+          <a:p>
+            <a:pPr>
+              <a:spcAft>
+                <a:spcPts val="800"/>
+              </a:spcAft>
+            </a:pPr>
+            <a:r>
+              <a:rPr sz="1100" b="1" i="0">
+                <a:solidFill>
+                  <a:srgbClr val="1D4ED8"/>
+                </a:solidFill>
+                <a:latin typeface="Segoe UI"/>
+              </a:rPr>
+              <a:t>A.  </a:t>
+            </a:r>
+            <a:r>
+              <a:rPr sz="1100" b="0" i="0">
+                <a:solidFill>
+                  <a:srgbClr val="3F3F46"/>
+                </a:solidFill>
+                <a:latin typeface="Segoe UI"/>
+              </a:rPr>
+              <a:t>roles/aiplatform.admin</a:t>
+            </a:r>
+          </a:p>
+          <a:p>
+            <a:pPr>
+              <a:spcAft>
+                <a:spcPts val="800"/>
+              </a:spcAft>
+            </a:pPr>
+            <a:r>
+              <a:rPr sz="1100" b="1" i="0">
+                <a:solidFill>
+                  <a:srgbClr val="1D4ED8"/>
+                </a:solidFill>
+                <a:latin typeface="Segoe UI"/>
+              </a:rPr>
+              <a:t>B.  </a:t>
+            </a:r>
+            <a:r>
+              <a:rPr sz="1100" b="0" i="0">
+                <a:solidFill>
+                  <a:srgbClr val="3F3F46"/>
+                </a:solidFill>
+                <a:latin typeface="Segoe UI"/>
+              </a:rPr>
+              <a:t>roles/viewer</a:t>
+            </a:r>
+          </a:p>
+          <a:p>
+            <a:pPr>
+              <a:spcAft>
+                <a:spcPts val="800"/>
+              </a:spcAft>
+            </a:pPr>
+            <a:r>
+              <a:rPr sz="1100" b="1" i="0">
+                <a:solidFill>
+                  <a:srgbClr val="1D4ED8"/>
+                </a:solidFill>
+                <a:latin typeface="Segoe UI"/>
+              </a:rPr>
+              <a:t>C.  </a:t>
+            </a:r>
+            <a:r>
+              <a:rPr sz="1100" b="0" i="0">
+                <a:solidFill>
+                  <a:srgbClr val="3F3F46"/>
+                </a:solidFill>
+                <a:latin typeface="Segoe UI"/>
+              </a:rPr>
+              <a:t>roles/aiplatform.user</a:t>
+            </a:r>
+          </a:p>
+          <a:p>
+            <a:pPr>
+              <a:spcAft>
+                <a:spcPts val="800"/>
+              </a:spcAft>
+            </a:pPr>
+            <a:r>
+              <a:rPr sz="1100" b="1" i="0">
+                <a:solidFill>
+                  <a:srgbClr val="1D4ED8"/>
+                </a:solidFill>
+                <a:latin typeface="Segoe UI"/>
+              </a:rPr>
+              <a:t>D.  </a:t>
+            </a:r>
+            <a:r>
+              <a:rPr sz="1100" b="0" i="0">
+                <a:solidFill>
+                  <a:srgbClr val="3F3F46"/>
+                </a:solidFill>
+                <a:latin typeface="Segoe UI"/>
+              </a:rPr>
+              <a:t>roles/bigquery.dataEditor</a:t>
+            </a:r>
+          </a:p>
+        </p:txBody>
+      </p:sp>
+      <p:sp>
+        <p:nvSpPr>
+          <p:cNvPr id="5" name="Rounded Rectangle 4"/>
+          <p:cNvSpPr/>
+          <p:nvPr/>
+        </p:nvSpPr>
+        <p:spPr>
+          <a:xfrm>
+            <a:off x="7315200" y="1645920"/>
+            <a:ext cx="4114800" cy="4480560"/>
+          </a:xfrm>
+          <a:prstGeom prst="roundRect">
+            <a:avLst/>
+          </a:prstGeom>
+          <a:solidFill>
+            <a:srgbClr val="FFFFFF"/>
+          </a:solidFill>
+          <a:ln w="15240">
+            <a:solidFill>
+              <a:srgbClr val="D4D4D8"/>
+            </a:solidFill>
+          </a:ln>
+        </p:spPr>
+        <p:style>
+          <a:lnRef idx="1">
+            <a:schemeClr val="accent1"/>
+          </a:lnRef>
+          <a:fillRef idx="3">
+            <a:schemeClr val="accent1"/>
+          </a:fillRef>
+          <a:effectRef idx="2">
+            <a:schemeClr val="accent1"/>
+          </a:effectRef>
+          <a:fontRef idx="minor">
+            <a:schemeClr val="lt1"/>
+          </a:fontRef>
+        </p:style>
+        <p:txBody>
+          <a:bodyPr rtlCol="0" anchor="ctr" wrap="square" lIns="228600" rIns="228600" tIns="182880" bIns="182880"/>
+          <a:lstStyle/>
+          <a:p>
+            <a:pPr algn="ctr">
+              <a:spcAft>
+                <a:spcPts val="1200"/>
+              </a:spcAft>
+            </a:pPr>
+            <a:r>
+              <a:rPr sz="1600" b="1" i="0">
+                <a:solidFill>
+                  <a:srgbClr val="18181B"/>
+                </a:solidFill>
+                <a:latin typeface="Segoe UI"/>
+              </a:rPr>
+              <a:t>Validation Panel</a:t>
+            </a:r>
+          </a:p>
+          <a:p>
+            <a:pPr>
+              <a:spcAft>
+                <a:spcPts val="1000"/>
+              </a:spcAft>
+            </a:pPr>
+            <a:r>
+              <a:rPr sz="1400" b="1" i="0">
+                <a:solidFill>
+                  <a:srgbClr val="047857"/>
+                </a:solidFill>
+                <a:latin typeface="Segoe UI"/>
+              </a:rPr>
+              <a:t>Correct Answer: C</a:t>
+            </a:r>
+          </a:p>
+          <a:p>
+            <a:pPr>
+              <a:spcAft>
+                <a:spcPts val="1400"/>
+              </a:spcAft>
+            </a:pPr>
+            <a:r>
+              <a:rPr sz="1100" b="0" i="0">
+                <a:solidFill>
+                  <a:srgbClr val="3F3F46"/>
+                </a:solidFill>
+                <a:latin typeface="Segoe UI"/>
+              </a:rPr>
+              <a:t>Explanation: The roles/aiplatform.user role provides the necessary permissions to prototype prompts, call model prediction routes, and use Vertex AI Studio playgrounds, while restricting access to administrative settings.</a:t>
+            </a:r>
+          </a:p>
+          <a:p>
+            <a:r>
+              <a:rPr sz="950" b="0" i="1">
+                <a:solidFill>
+                  <a:srgbClr val="71717A"/>
+                </a:solidFill>
+                <a:latin typeface="Segoe UI"/>
+              </a:rPr>
+              <a:t>GCP Reference: Vertex AI - Access Control (https://cloud.google.com/vertex-ai/docs/general/access-control)</a:t>
+            </a:r>
+          </a:p>
+        </p:txBody>
+      </p:sp>
+    </p:spTree>
+  </p:cSld>
+  <p:clrMapOvr>
+    <a:masterClrMapping/>
+  </p:clrMapOvr>
+</p:sld>
+</file>
+
+<file path=ppt/slides/slide18.xml><?xml version="1.0" encoding="utf-8"?>
+<p:sld xmlns:a="http://schemas.openxmlformats.org/drawingml/2006/main" xmlns:p="http://schemas.openxmlformats.org/presentationml/2006/main" xmlns:r="http://schemas.openxmlformats.org/officeDocument/2006/relationships">
+  <p:cSld>
+    <p:bg>
+      <p:bgPr>
+        <a:solidFill>
+          <a:srgbClr val="E4E4E6"/>
+        </a:solidFill>
+        <a:effectLst/>
+      </p:bgPr>
+    </p:bg>
+    <p:spTree>
+      <p:nvGrpSpPr>
+        <p:cNvPr id="1" name=""/>
+        <p:cNvGrpSpPr/>
+        <p:nvPr/>
+      </p:nvGrpSpPr>
+      <p:grpSpPr/>
+      <p:sp>
+        <p:nvSpPr>
+          <p:cNvPr id="2" name="TextBox 1"/>
+          <p:cNvSpPr txBox="1"/>
+          <p:nvPr/>
+        </p:nvSpPr>
+        <p:spPr>
+          <a:xfrm>
+            <a:off x="731520" y="365760"/>
+            <a:ext cx="10698480" cy="274320"/>
+          </a:xfrm>
+          <a:prstGeom prst="rect">
+            <a:avLst/>
+          </a:prstGeom>
+          <a:noFill/>
+        </p:spPr>
+        <p:txBody>
+          <a:bodyPr wrap="square" lIns="0" rIns="0" tIns="0" bIns="0">
+            <a:spAutoFit/>
+          </a:bodyPr>
+          <a:lstStyle/>
+          <a:p>
+            <a:r>
+              <a:rPr sz="1000" b="1" i="0">
+                <a:solidFill>
+                  <a:srgbClr val="1D4ED8"/>
+                </a:solidFill>
+                <a:latin typeface="Segoe UI"/>
+              </a:rPr>
+              <a:t>PRACTICE SCENARIO 9 OF 10</a:t>
+            </a:r>
+          </a:p>
+        </p:txBody>
+      </p:sp>
+      <p:sp>
+        <p:nvSpPr>
+          <p:cNvPr id="3" name="TextBox 2"/>
+          <p:cNvSpPr txBox="1"/>
+          <p:nvPr/>
+        </p:nvSpPr>
+        <p:spPr>
+          <a:xfrm>
+            <a:off x="731520" y="640080"/>
+            <a:ext cx="10698480" cy="548640"/>
+          </a:xfrm>
+          <a:prstGeom prst="rect">
+            <a:avLst/>
+          </a:prstGeom>
+          <a:noFill/>
+        </p:spPr>
+        <p:txBody>
+          <a:bodyPr wrap="square" lIns="0" rIns="0" tIns="0" bIns="0">
+            <a:spAutoFit/>
+          </a:bodyPr>
+          <a:lstStyle/>
+          <a:p>
+            <a:r>
+              <a:rPr sz="2800" b="1" i="0">
+                <a:solidFill>
+                  <a:srgbClr val="18181B"/>
+                </a:solidFill>
+                <a:latin typeface="Segoe UI"/>
+              </a:rPr>
+              <a:t>Mitigating Summary Hallucinations</a:t>
+            </a:r>
+          </a:p>
+        </p:txBody>
+      </p:sp>
+      <p:sp>
+        <p:nvSpPr>
+          <p:cNvPr id="4" name="TextBox 3"/>
+          <p:cNvSpPr txBox="1"/>
+          <p:nvPr/>
+        </p:nvSpPr>
+        <p:spPr>
+          <a:xfrm>
+            <a:off x="731520" y="1371600"/>
+            <a:ext cx="6217920" cy="4754880"/>
+          </a:xfrm>
+          <a:prstGeom prst="rect">
+            <a:avLst/>
+          </a:prstGeom>
+          <a:noFill/>
+        </p:spPr>
+        <p:txBody>
+          <a:bodyPr wrap="square" lIns="0" rIns="0" tIns="0" bIns="0">
+            <a:spAutoFit/>
+          </a:bodyPr>
+          <a:lstStyle/>
+          <a:p>
+            <a:pPr>
+              <a:spcAft>
+                <a:spcPts val="1400"/>
+              </a:spcAft>
+            </a:pPr>
+            <a:r>
+              <a:rPr sz="1200" b="1" i="0">
+                <a:solidFill>
+                  <a:srgbClr val="18181B"/>
+                </a:solidFill>
+                <a:latin typeface="Segoe UI"/>
+              </a:rPr>
+              <a:t>A hospital uses a model to summarize patient discharge notes. During trials, the model occasionally inserts fabricated medications not present in the patient's records. Which strategy is most effective to eliminate these hallucinations?</a:t>
+            </a:r>
+          </a:p>
+          <a:p>
+            <a:pPr>
+              <a:spcAft>
+                <a:spcPts val="800"/>
+              </a:spcAft>
+            </a:pPr>
+            <a:r>
+              <a:rPr sz="1100" b="1" i="0">
+                <a:solidFill>
+                  <a:srgbClr val="1D4ED8"/>
+                </a:solidFill>
+                <a:latin typeface="Segoe UI"/>
+              </a:rPr>
+              <a:t>A.  </a:t>
+            </a:r>
+            <a:r>
+              <a:rPr sz="1100" b="0" i="0">
+                <a:solidFill>
+                  <a:srgbClr val="3F3F46"/>
+                </a:solidFill>
+                <a:latin typeface="Segoe UI"/>
+              </a:rPr>
+              <a:t>Set the Temperature to 1.5 and increase Top-K.</a:t>
+            </a:r>
+          </a:p>
+          <a:p>
+            <a:pPr>
+              <a:spcAft>
+                <a:spcPts val="800"/>
+              </a:spcAft>
+            </a:pPr>
+            <a:r>
+              <a:rPr sz="1100" b="1" i="0">
+                <a:solidFill>
+                  <a:srgbClr val="1D4ED8"/>
+                </a:solidFill>
+                <a:latin typeface="Segoe UI"/>
+              </a:rPr>
+              <a:t>B.  </a:t>
+            </a:r>
+            <a:r>
+              <a:rPr sz="1100" b="0" i="0">
+                <a:solidFill>
+                  <a:srgbClr val="3F3F46"/>
+                </a:solidFill>
+                <a:latin typeface="Segoe UI"/>
+              </a:rPr>
+              <a:t>Apply supervised fine-tuning with a general vocabulary corpus.</a:t>
+            </a:r>
+          </a:p>
+          <a:p>
+            <a:pPr>
+              <a:spcAft>
+                <a:spcPts val="800"/>
+              </a:spcAft>
+            </a:pPr>
+            <a:r>
+              <a:rPr sz="1100" b="1" i="0">
+                <a:solidFill>
+                  <a:srgbClr val="1D4ED8"/>
+                </a:solidFill>
+                <a:latin typeface="Segoe UI"/>
+              </a:rPr>
+              <a:t>C.  </a:t>
+            </a:r>
+            <a:r>
+              <a:rPr sz="1100" b="0" i="0">
+                <a:solidFill>
+                  <a:srgbClr val="3F3F46"/>
+                </a:solidFill>
+                <a:latin typeface="Segoe UI"/>
+              </a:rPr>
+              <a:t>Ground the model by passing the complete medical record in the prompt context and setting the Temperature to 0.0 to enforce strict factual compliance.</a:t>
+            </a:r>
+          </a:p>
+          <a:p>
+            <a:pPr>
+              <a:spcAft>
+                <a:spcPts val="800"/>
+              </a:spcAft>
+            </a:pPr>
+            <a:r>
+              <a:rPr sz="1100" b="1" i="0">
+                <a:solidFill>
+                  <a:srgbClr val="1D4ED8"/>
+                </a:solidFill>
+                <a:latin typeface="Segoe UI"/>
+              </a:rPr>
+              <a:t>D.  </a:t>
+            </a:r>
+            <a:r>
+              <a:rPr sz="1100" b="0" i="0">
+                <a:solidFill>
+                  <a:srgbClr val="3F3F46"/>
+                </a:solidFill>
+                <a:latin typeface="Segoe UI"/>
+              </a:rPr>
+              <a:t>Switch to a smaller model size.</a:t>
+            </a:r>
+          </a:p>
+        </p:txBody>
+      </p:sp>
+      <p:sp>
+        <p:nvSpPr>
+          <p:cNvPr id="5" name="Rounded Rectangle 4"/>
+          <p:cNvSpPr/>
+          <p:nvPr/>
+        </p:nvSpPr>
+        <p:spPr>
+          <a:xfrm>
+            <a:off x="7315200" y="1645920"/>
+            <a:ext cx="4114800" cy="4480560"/>
+          </a:xfrm>
+          <a:prstGeom prst="roundRect">
+            <a:avLst/>
+          </a:prstGeom>
+          <a:solidFill>
+            <a:srgbClr val="FFFFFF"/>
+          </a:solidFill>
+          <a:ln w="15240">
+            <a:solidFill>
+              <a:srgbClr val="D4D4D8"/>
+            </a:solidFill>
+          </a:ln>
+        </p:spPr>
+        <p:style>
+          <a:lnRef idx="1">
+            <a:schemeClr val="accent1"/>
+          </a:lnRef>
+          <a:fillRef idx="3">
+            <a:schemeClr val="accent1"/>
+          </a:fillRef>
+          <a:effectRef idx="2">
+            <a:schemeClr val="accent1"/>
+          </a:effectRef>
+          <a:fontRef idx="minor">
+            <a:schemeClr val="lt1"/>
+          </a:fontRef>
+        </p:style>
+        <p:txBody>
+          <a:bodyPr rtlCol="0" anchor="ctr" wrap="square" lIns="228600" rIns="228600" tIns="182880" bIns="182880"/>
+          <a:lstStyle/>
+          <a:p>
+            <a:pPr algn="ctr">
+              <a:spcAft>
+                <a:spcPts val="1200"/>
+              </a:spcAft>
+            </a:pPr>
+            <a:r>
+              <a:rPr sz="1600" b="1" i="0">
+                <a:solidFill>
+                  <a:srgbClr val="18181B"/>
+                </a:solidFill>
+                <a:latin typeface="Segoe UI"/>
+              </a:rPr>
+              <a:t>Validation Panel</a:t>
+            </a:r>
+          </a:p>
+          <a:p>
+            <a:pPr>
+              <a:spcAft>
+                <a:spcPts val="1000"/>
+              </a:spcAft>
+            </a:pPr>
+            <a:r>
+              <a:rPr sz="1400" b="1" i="0">
+                <a:solidFill>
+                  <a:srgbClr val="047857"/>
+                </a:solidFill>
+                <a:latin typeface="Segoe UI"/>
+              </a:rPr>
+              <a:t>Correct Answer: C</a:t>
+            </a:r>
+          </a:p>
+          <a:p>
+            <a:pPr>
+              <a:spcAft>
+                <a:spcPts val="1400"/>
+              </a:spcAft>
+            </a:pPr>
+            <a:r>
+              <a:rPr sz="1100" b="0" i="0">
+                <a:solidFill>
+                  <a:srgbClr val="3F3F46"/>
+                </a:solidFill>
+                <a:latin typeface="Segoe UI"/>
+              </a:rPr>
+              <a:t>Explanation: Hallucinations are mitigated by grounding the model in the source context and setting the Temperature to 0.0 (or very low) to make token selection deterministic. This forces the model to synthesize text strictly from the provided inputs.</a:t>
+            </a:r>
+          </a:p>
+          <a:p>
+            <a:r>
+              <a:rPr sz="950" b="0" i="1">
+                <a:solidFill>
+                  <a:srgbClr val="71717A"/>
+                </a:solidFill>
+                <a:latin typeface="Segoe UI"/>
+              </a:rPr>
+              <a:t>GCP Reference: Vertex AI - Grounding Generative Models (https://cloud.google.com/blog/products/ai-machine-learning/grounding-generative-ai-models-with-vertex-ai)</a:t>
+            </a:r>
+          </a:p>
+        </p:txBody>
+      </p:sp>
+    </p:spTree>
+  </p:cSld>
+  <p:clrMapOvr>
+    <a:masterClrMapping/>
+  </p:clrMapOvr>
+</p:sld>
+</file>
+
+<file path=ppt/slides/slide19.xml><?xml version="1.0" encoding="utf-8"?>
+<p:sld xmlns:a="http://schemas.openxmlformats.org/drawingml/2006/main" xmlns:p="http://schemas.openxmlformats.org/presentationml/2006/main" xmlns:r="http://schemas.openxmlformats.org/officeDocument/2006/relationships">
+  <p:cSld>
+    <p:bg>
+      <p:bgPr>
+        <a:solidFill>
+          <a:srgbClr val="E4E4E6"/>
+        </a:solidFill>
+        <a:effectLst/>
+      </p:bgPr>
+    </p:bg>
+    <p:spTree>
+      <p:nvGrpSpPr>
+        <p:cNvPr id="1" name=""/>
+        <p:cNvGrpSpPr/>
+        <p:nvPr/>
+      </p:nvGrpSpPr>
+      <p:grpSpPr/>
+      <p:sp>
+        <p:nvSpPr>
+          <p:cNvPr id="2" name="TextBox 1"/>
+          <p:cNvSpPr txBox="1"/>
+          <p:nvPr/>
+        </p:nvSpPr>
+        <p:spPr>
+          <a:xfrm>
+            <a:off x="731520" y="365760"/>
+            <a:ext cx="10698480" cy="274320"/>
+          </a:xfrm>
+          <a:prstGeom prst="rect">
+            <a:avLst/>
+          </a:prstGeom>
+          <a:noFill/>
+        </p:spPr>
+        <p:txBody>
+          <a:bodyPr wrap="square" lIns="0" rIns="0" tIns="0" bIns="0">
+            <a:spAutoFit/>
+          </a:bodyPr>
+          <a:lstStyle/>
+          <a:p>
+            <a:r>
+              <a:rPr sz="1000" b="1" i="0">
+                <a:solidFill>
+                  <a:srgbClr val="1D4ED8"/>
+                </a:solidFill>
+                <a:latin typeface="Segoe UI"/>
+              </a:rPr>
+              <a:t>PRACTICE SCENARIO 10 OF 10</a:t>
+            </a:r>
+          </a:p>
+        </p:txBody>
+      </p:sp>
+      <p:sp>
+        <p:nvSpPr>
+          <p:cNvPr id="3" name="TextBox 2"/>
+          <p:cNvSpPr txBox="1"/>
+          <p:nvPr/>
+        </p:nvSpPr>
+        <p:spPr>
+          <a:xfrm>
+            <a:off x="731520" y="640080"/>
+            <a:ext cx="10698480" cy="548640"/>
+          </a:xfrm>
+          <a:prstGeom prst="rect">
+            <a:avLst/>
+          </a:prstGeom>
+          <a:noFill/>
+        </p:spPr>
+        <p:txBody>
+          <a:bodyPr wrap="square" lIns="0" rIns="0" tIns="0" bIns="0">
+            <a:spAutoFit/>
+          </a:bodyPr>
+          <a:lstStyle/>
+          <a:p>
+            <a:r>
+              <a:rPr sz="2800" b="1" i="0">
+                <a:solidFill>
+                  <a:srgbClr val="18181B"/>
+                </a:solidFill>
+                <a:latin typeface="Segoe UI"/>
+              </a:rPr>
+              <a:t>Optimizing Token Costs</a:t>
+            </a:r>
+          </a:p>
+        </p:txBody>
+      </p:sp>
+      <p:sp>
+        <p:nvSpPr>
+          <p:cNvPr id="4" name="TextBox 3"/>
+          <p:cNvSpPr txBox="1"/>
+          <p:nvPr/>
+        </p:nvSpPr>
+        <p:spPr>
+          <a:xfrm>
+            <a:off x="731520" y="1371600"/>
+            <a:ext cx="6217920" cy="4754880"/>
+          </a:xfrm>
+          <a:prstGeom prst="rect">
+            <a:avLst/>
+          </a:prstGeom>
+          <a:noFill/>
+        </p:spPr>
+        <p:txBody>
+          <a:bodyPr wrap="square" lIns="0" rIns="0" tIns="0" bIns="0">
+            <a:spAutoFit/>
+          </a:bodyPr>
+          <a:lstStyle/>
+          <a:p>
+            <a:pPr>
+              <a:spcAft>
+                <a:spcPts val="1400"/>
+              </a:spcAft>
+            </a:pPr>
+            <a:r>
+              <a:rPr sz="1200" b="1" i="0">
+                <a:solidFill>
+                  <a:srgbClr val="18181B"/>
+                </a:solidFill>
+                <a:latin typeface="Segoe UI"/>
+              </a:rPr>
+              <a:t>You run a customer support chatbot that pre-loads a massive 50,000-token company FAQ context into every prompt. The chatbot processes thousands of queries hourly, leading to high API token costs. How can you optimize costs on Vertex AI?</a:t>
+            </a:r>
+          </a:p>
+          <a:p>
+            <a:pPr>
+              <a:spcAft>
+                <a:spcPts val="800"/>
+              </a:spcAft>
+            </a:pPr>
+            <a:r>
+              <a:rPr sz="1100" b="1" i="0">
+                <a:solidFill>
+                  <a:srgbClr val="1D4ED8"/>
+                </a:solidFill>
+                <a:latin typeface="Segoe UI"/>
+              </a:rPr>
+              <a:t>A.  </a:t>
+            </a:r>
+            <a:r>
+              <a:rPr sz="1100" b="0" i="0">
+                <a:solidFill>
+                  <a:srgbClr val="3F3F46"/>
+                </a:solidFill>
+                <a:latin typeface="Segoe UI"/>
+              </a:rPr>
+              <a:t>Shorten the FAQ list manually to 500 tokens.</a:t>
+            </a:r>
+          </a:p>
+          <a:p>
+            <a:pPr>
+              <a:spcAft>
+                <a:spcPts val="800"/>
+              </a:spcAft>
+            </a:pPr>
+            <a:r>
+              <a:rPr sz="1100" b="1" i="0">
+                <a:solidFill>
+                  <a:srgbClr val="1D4ED8"/>
+                </a:solidFill>
+                <a:latin typeface="Segoe UI"/>
+              </a:rPr>
+              <a:t>B.  </a:t>
+            </a:r>
+            <a:r>
+              <a:rPr sz="1100" b="0" i="0">
+                <a:solidFill>
+                  <a:srgbClr val="3F3F46"/>
+                </a:solidFill>
+                <a:latin typeface="Segoe UI"/>
+              </a:rPr>
+              <a:t>Enable Context Caching on Vertex AI to cache the FAQ token representations, paying a lower rate for cached tokens during subsequent queries.</a:t>
+            </a:r>
+          </a:p>
+          <a:p>
+            <a:pPr>
+              <a:spcAft>
+                <a:spcPts val="800"/>
+              </a:spcAft>
+            </a:pPr>
+            <a:r>
+              <a:rPr sz="1100" b="1" i="0">
+                <a:solidFill>
+                  <a:srgbClr val="1D4ED8"/>
+                </a:solidFill>
+                <a:latin typeface="Segoe UI"/>
+              </a:rPr>
+              <a:t>C.  </a:t>
+            </a:r>
+            <a:r>
+              <a:rPr sz="1100" b="0" i="0">
+                <a:solidFill>
+                  <a:srgbClr val="3F3F46"/>
+                </a:solidFill>
+                <a:latin typeface="Segoe UI"/>
+              </a:rPr>
+              <a:t>Migrate the model to run locally on a VM instance.</a:t>
+            </a:r>
+          </a:p>
+          <a:p>
+            <a:pPr>
+              <a:spcAft>
+                <a:spcPts val="800"/>
+              </a:spcAft>
+            </a:pPr>
+            <a:r>
+              <a:rPr sz="1100" b="1" i="0">
+                <a:solidFill>
+                  <a:srgbClr val="1D4ED8"/>
+                </a:solidFill>
+                <a:latin typeface="Segoe UI"/>
+              </a:rPr>
+              <a:t>D.  </a:t>
+            </a:r>
+            <a:r>
+              <a:rPr sz="1100" b="0" i="0">
+                <a:solidFill>
+                  <a:srgbClr val="3F3F46"/>
+                </a:solidFill>
+                <a:latin typeface="Segoe UI"/>
+              </a:rPr>
+              <a:t>Increase the Temperature to compress outputs.</a:t>
+            </a:r>
+          </a:p>
+        </p:txBody>
+      </p:sp>
+      <p:sp>
+        <p:nvSpPr>
+          <p:cNvPr id="5" name="Rounded Rectangle 4"/>
+          <p:cNvSpPr/>
+          <p:nvPr/>
+        </p:nvSpPr>
+        <p:spPr>
+          <a:xfrm>
+            <a:off x="7315200" y="1645920"/>
+            <a:ext cx="4114800" cy="4480560"/>
+          </a:xfrm>
+          <a:prstGeom prst="roundRect">
+            <a:avLst/>
+          </a:prstGeom>
+          <a:solidFill>
+            <a:srgbClr val="FFFFFF"/>
+          </a:solidFill>
+          <a:ln w="15240">
+            <a:solidFill>
+              <a:srgbClr val="D4D4D8"/>
+            </a:solidFill>
+          </a:ln>
+        </p:spPr>
+        <p:style>
+          <a:lnRef idx="1">
+            <a:schemeClr val="accent1"/>
+          </a:lnRef>
+          <a:fillRef idx="3">
+            <a:schemeClr val="accent1"/>
+          </a:fillRef>
+          <a:effectRef idx="2">
+            <a:schemeClr val="accent1"/>
+          </a:effectRef>
+          <a:fontRef idx="minor">
+            <a:schemeClr val="lt1"/>
+          </a:fontRef>
+        </p:style>
+        <p:txBody>
+          <a:bodyPr rtlCol="0" anchor="ctr" wrap="square" lIns="228600" rIns="228600" tIns="182880" bIns="182880"/>
+          <a:lstStyle/>
+          <a:p>
+            <a:pPr algn="ctr">
+              <a:spcAft>
+                <a:spcPts val="1200"/>
+              </a:spcAft>
+            </a:pPr>
+            <a:r>
+              <a:rPr sz="1600" b="1" i="0">
+                <a:solidFill>
+                  <a:srgbClr val="18181B"/>
+                </a:solidFill>
+                <a:latin typeface="Segoe UI"/>
+              </a:rPr>
+              <a:t>Validation Panel</a:t>
+            </a:r>
+          </a:p>
+          <a:p>
+            <a:pPr>
+              <a:spcAft>
+                <a:spcPts val="1000"/>
+              </a:spcAft>
+            </a:pPr>
+            <a:r>
+              <a:rPr sz="1400" b="1" i="0">
+                <a:solidFill>
+                  <a:srgbClr val="047857"/>
+                </a:solidFill>
+                <a:latin typeface="Segoe UI"/>
+              </a:rPr>
+              <a:t>Correct Answer: B</a:t>
+            </a:r>
+          </a:p>
+          <a:p>
+            <a:pPr>
+              <a:spcAft>
+                <a:spcPts val="1400"/>
+              </a:spcAft>
+            </a:pPr>
+            <a:r>
+              <a:rPr sz="1100" b="0" i="0">
+                <a:solidFill>
+                  <a:srgbClr val="3F3F46"/>
+                </a:solidFill>
+                <a:latin typeface="Segoe UI"/>
+              </a:rPr>
+              <a:t>Explanation: Context Caching allows caching of large, static context data (such as FAQs, system instructions, or document chunks) in the Gemini API. Subsequent calls referencing the cache pay a significantly lower rate for token processing, optimizing cost and reducing latency.</a:t>
+            </a:r>
+          </a:p>
+          <a:p>
+            <a:r>
+              <a:rPr sz="950" b="0" i="1">
+                <a:solidFill>
+                  <a:srgbClr val="71717A"/>
+                </a:solidFill>
+                <a:latin typeface="Segoe UI"/>
+              </a:rPr>
+              <a:t>GCP Reference: Vertex AI - Context Caching Overview (https://cloud.google.com/vertex-ai/docs/generative-ai/context-caching-overview)</a:t>
             </a:r>
           </a:p>
         </p:txBody>
@@ -7460,7 +9702,7 @@
                 </a:solidFill>
                 <a:latin typeface="Segoe UI"/>
               </a:rPr>
-              <a:t>DEVELOPER GUIDE</a:t>
+              <a:t>MLOPS MONITORING</a:t>
             </a:r>
           </a:p>
         </p:txBody>
@@ -7494,7 +9736,7 @@
                 </a:solidFill>
                 <a:latin typeface="Segoe UI"/>
               </a:rPr>
-              <a:t>Vertex AI Gemini API SDK (Python)</a:t>
+              <a:t>LLM Safety &amp; Monitoring Integration</a:t>
             </a:r>
           </a:p>
         </p:txBody>
@@ -7507,8 +9749,8 @@
         </p:nvSpPr>
         <p:spPr>
           <a:xfrm>
-            <a:off x="731520" y="1280160"/>
-            <a:ext cx="10698480" cy="365760"/>
+            <a:off x="731520" y="1645920"/>
+            <a:ext cx="6217920" cy="2926080"/>
           </a:xfrm>
           <a:prstGeom prst="rect">
             <a:avLst/>
@@ -7516,19 +9758,110 @@
           <a:noFill/>
         </p:spPr>
         <p:txBody>
-          <a:bodyPr wrap="none">
+          <a:bodyPr wrap="square" lIns="0" rIns="0" tIns="0" bIns="0">
             <a:spAutoFit/>
           </a:bodyPr>
           <a:lstStyle/>
           <a:p>
-            <a:r>
-              <a:rPr sz="1300" b="0" i="0">
+            <a:pPr>
+              <a:spcAft>
+                <a:spcPts val="1200"/>
+              </a:spcAft>
+            </a:pPr>
+            <a:r>
+              <a:rPr sz="1300" b="1" i="0">
+                <a:solidFill>
+                  <a:srgbClr val="1D4ED8"/>
+                </a:solidFill>
+                <a:latin typeface="Segoe UI"/>
+              </a:rPr>
+              <a:t>→  </a:t>
+            </a:r>
+            <a:r>
+              <a:rPr sz="1250" b="1" i="0">
                 <a:solidFill>
                   <a:srgbClr val="18181B"/>
                 </a:solidFill>
                 <a:latin typeface="Segoe UI"/>
               </a:rPr>
-              <a:t>Interacting with Gemini models programmatically using the official google-genai library:</a:t>
+              <a:t>Content Moderation Filters: </a:t>
+            </a:r>
+            <a:r>
+              <a:rPr sz="1250" b="0" i="0">
+                <a:solidFill>
+                  <a:srgbClr val="3F3F46"/>
+                </a:solidFill>
+                <a:latin typeface="Segoe UI"/>
+              </a:rPr>
+              <a:t>Built-in safety hooks that evaluate model queries and responses for harassment, hate speech, and explicit blocks.</a:t>
+            </a:r>
+          </a:p>
+          <a:p>
+            <a:pPr>
+              <a:spcAft>
+                <a:spcPts val="1200"/>
+              </a:spcAft>
+            </a:pPr>
+            <a:r>
+              <a:rPr sz="1300" b="1" i="0">
+                <a:solidFill>
+                  <a:srgbClr val="1D4ED8"/>
+                </a:solidFill>
+                <a:latin typeface="Segoe UI"/>
+              </a:rPr>
+              <a:t>→  </a:t>
+            </a:r>
+            <a:r>
+              <a:rPr sz="1250" b="1" i="0">
+                <a:solidFill>
+                  <a:srgbClr val="18181B"/>
+                </a:solidFill>
+                <a:latin typeface="Segoe UI"/>
+              </a:rPr>
+              <a:t>Semantic Drift Checks: </a:t>
+            </a:r>
+            <a:r>
+              <a:rPr sz="1250" b="0" i="0">
+                <a:solidFill>
+                  <a:srgbClr val="3F3F46"/>
+                </a:solidFill>
+                <a:latin typeface="Segoe UI"/>
+              </a:rPr>
+              <a:t>Monitoring client prompt query patterns over time to capture task drift or adversarial injection patterns.</a:t>
+            </a:r>
+          </a:p>
+          <a:p>
+            <a:pPr>
+              <a:spcAft>
+                <a:spcPts val="1200"/>
+              </a:spcAft>
+            </a:pPr>
+            <a:r>
+              <a:rPr sz="1300" b="1" i="0">
+                <a:solidFill>
+                  <a:srgbClr val="1D4ED8"/>
+                </a:solidFill>
+                <a:latin typeface="Segoe UI"/>
+              </a:rPr>
+              <a:t>→  </a:t>
+            </a:r>
+            <a:r>
+              <a:rPr sz="1250" b="1" i="0">
+                <a:solidFill>
+                  <a:srgbClr val="18181B"/>
+                </a:solidFill>
+                <a:latin typeface="Segoe UI"/>
+              </a:rPr>
+              <a:t>Guardrails Integration: </a:t>
+            </a:r>
+            <a:r>
+              <a:rPr sz="1250" b="0" i="0">
+                <a:solidFill>
+                  <a:srgbClr val="3F3F46"/>
+                </a:solidFill>
+                <a:latin typeface="Segoe UI"/>
+              </a:rPr>
+              <a:t>Wrapping model routes with external middleware to filter toxic language prior to client presentation.</a:t>
             </a:r>
           </a:p>
         </p:txBody>
@@ -7541,1046 +9874,8 @@
         </p:nvSpPr>
         <p:spPr>
           <a:xfrm>
-            <a:off x="731520" y="1737360"/>
-            <a:ext cx="10725912" cy="3108960"/>
-          </a:xfrm>
-          <a:prstGeom prst="rect">
-            <a:avLst/>
-          </a:prstGeom>
-          <a:solidFill>
-            <a:srgbClr val="F4F4F5"/>
-          </a:solidFill>
-          <a:ln w="12700">
-            <a:solidFill>
-              <a:srgbClr val="D4D4D8"/>
-            </a:solidFill>
-          </a:ln>
-        </p:spPr>
-        <p:style>
-          <a:lnRef idx="1">
-            <a:schemeClr val="accent1"/>
-          </a:lnRef>
-          <a:fillRef idx="3">
-            <a:schemeClr val="accent1"/>
-          </a:fillRef>
-          <a:effectRef idx="2">
-            <a:schemeClr val="accent1"/>
-          </a:effectRef>
-          <a:fontRef idx="minor">
-            <a:schemeClr val="lt1"/>
-          </a:fontRef>
-        </p:style>
-        <p:txBody>
-          <a:bodyPr rtlCol="0" anchor="ctr" wrap="square" lIns="228600" rIns="228600" tIns="182880" bIns="182880"/>
-          <a:lstStyle/>
-          <a:p>
-            <a:pPr algn="ctr">
-              <a:spcAft>
-                <a:spcPts val="200"/>
-              </a:spcAft>
-            </a:pPr>
-            <a:r>
-              <a:rPr sz="950" b="1" i="0">
-                <a:solidFill>
-                  <a:srgbClr val="BE185D"/>
-                </a:solidFill>
-                <a:latin typeface="Consolas"/>
-              </a:rPr>
-              <a:t>from</a:t>
-            </a:r>
-            <a:r>
-              <a:rPr sz="950" b="0" i="0">
-                <a:solidFill>
-                  <a:srgbClr val="3F3F46"/>
-                </a:solidFill>
-                <a:latin typeface="Consolas"/>
-              </a:rPr>
-              <a:t> </a:t>
-            </a:r>
-            <a:r>
-              <a:rPr sz="950" b="0" i="0">
-                <a:solidFill>
-                  <a:srgbClr val="18181B"/>
-                </a:solidFill>
-                <a:latin typeface="Consolas"/>
-              </a:rPr>
-              <a:t>google</a:t>
-            </a:r>
-            <a:r>
-              <a:rPr sz="950" b="0" i="0">
-                <a:solidFill>
-                  <a:srgbClr val="3F3F46"/>
-                </a:solidFill>
-                <a:latin typeface="Consolas"/>
-              </a:rPr>
-              <a:t> </a:t>
-            </a:r>
-            <a:r>
-              <a:rPr sz="950" b="1" i="0">
-                <a:solidFill>
-                  <a:srgbClr val="BE185D"/>
-                </a:solidFill>
-                <a:latin typeface="Consolas"/>
-              </a:rPr>
-              <a:t>import</a:t>
-            </a:r>
-            <a:r>
-              <a:rPr sz="950" b="0" i="0">
-                <a:solidFill>
-                  <a:srgbClr val="3F3F46"/>
-                </a:solidFill>
-                <a:latin typeface="Consolas"/>
-              </a:rPr>
-              <a:t> </a:t>
-            </a:r>
-            <a:r>
-              <a:rPr sz="950" b="0" i="0">
-                <a:solidFill>
-                  <a:srgbClr val="18181B"/>
-                </a:solidFill>
-                <a:latin typeface="Consolas"/>
-              </a:rPr>
-              <a:t>genai</a:t>
-            </a:r>
-          </a:p>
-          <a:p>
-            <a:pPr>
-              <a:spcAft>
-                <a:spcPts val="200"/>
-              </a:spcAft>
-            </a:pPr>
-            <a:r>
-              <a:rPr sz="950" b="1" i="0">
-                <a:solidFill>
-                  <a:srgbClr val="BE185D"/>
-                </a:solidFill>
-                <a:latin typeface="Consolas"/>
-              </a:rPr>
-              <a:t>from</a:t>
-            </a:r>
-            <a:r>
-              <a:rPr sz="950" b="0" i="0">
-                <a:solidFill>
-                  <a:srgbClr val="3F3F46"/>
-                </a:solidFill>
-                <a:latin typeface="Consolas"/>
-              </a:rPr>
-              <a:t> </a:t>
-            </a:r>
-            <a:r>
-              <a:rPr sz="950" b="0" i="0">
-                <a:solidFill>
-                  <a:srgbClr val="18181B"/>
-                </a:solidFill>
-                <a:latin typeface="Consolas"/>
-              </a:rPr>
-              <a:t>google</a:t>
-            </a:r>
-            <a:r>
-              <a:rPr sz="950" b="0" i="0">
-                <a:solidFill>
-                  <a:srgbClr val="3F3F46"/>
-                </a:solidFill>
-                <a:latin typeface="Consolas"/>
-              </a:rPr>
-              <a:t>.</a:t>
-            </a:r>
-            <a:r>
-              <a:rPr sz="950" b="0" i="0">
-                <a:solidFill>
-                  <a:srgbClr val="18181B"/>
-                </a:solidFill>
-                <a:latin typeface="Consolas"/>
-              </a:rPr>
-              <a:t>genai</a:t>
-            </a:r>
-            <a:r>
-              <a:rPr sz="950" b="0" i="0">
-                <a:solidFill>
-                  <a:srgbClr val="3F3F46"/>
-                </a:solidFill>
-                <a:latin typeface="Consolas"/>
-              </a:rPr>
-              <a:t> </a:t>
-            </a:r>
-            <a:r>
-              <a:rPr sz="950" b="1" i="0">
-                <a:solidFill>
-                  <a:srgbClr val="BE185D"/>
-                </a:solidFill>
-                <a:latin typeface="Consolas"/>
-              </a:rPr>
-              <a:t>import</a:t>
-            </a:r>
-            <a:r>
-              <a:rPr sz="950" b="0" i="0">
-                <a:solidFill>
-                  <a:srgbClr val="3F3F46"/>
-                </a:solidFill>
-                <a:latin typeface="Consolas"/>
-              </a:rPr>
-              <a:t> </a:t>
-            </a:r>
-            <a:r>
-              <a:rPr sz="950" b="0" i="0">
-                <a:solidFill>
-                  <a:srgbClr val="18181B"/>
-                </a:solidFill>
-                <a:latin typeface="Consolas"/>
-              </a:rPr>
-              <a:t>types</a:t>
-            </a:r>
-          </a:p>
-          <a:p>
-            <a:pPr>
-              <a:spcAft>
-                <a:spcPts val="200"/>
-              </a:spcAft>
-            </a:pPr>
-          </a:p>
-          <a:p>
-            <a:pPr>
-              <a:spcAft>
-                <a:spcPts val="200"/>
-              </a:spcAft>
-            </a:pPr>
-            <a:r>
-              <a:rPr sz="950" b="0" i="0">
-                <a:solidFill>
-                  <a:srgbClr val="18181B"/>
-                </a:solidFill>
-                <a:latin typeface="Consolas"/>
-              </a:rPr>
-              <a:t>client</a:t>
-            </a:r>
-            <a:r>
-              <a:rPr sz="950" b="0" i="0">
-                <a:solidFill>
-                  <a:srgbClr val="3F3F46"/>
-                </a:solidFill>
-                <a:latin typeface="Consolas"/>
-              </a:rPr>
-              <a:t> </a:t>
-            </a:r>
-            <a:r>
-              <a:rPr sz="950" b="0" i="0">
-                <a:solidFill>
-                  <a:srgbClr val="3F3F46"/>
-                </a:solidFill>
-                <a:latin typeface="Consolas"/>
-              </a:rPr>
-              <a:t>=</a:t>
-            </a:r>
-            <a:r>
-              <a:rPr sz="950" b="0" i="0">
-                <a:solidFill>
-                  <a:srgbClr val="3F3F46"/>
-                </a:solidFill>
-                <a:latin typeface="Consolas"/>
-              </a:rPr>
-              <a:t> </a:t>
-            </a:r>
-            <a:r>
-              <a:rPr sz="950" b="0" i="0">
-                <a:solidFill>
-                  <a:srgbClr val="18181B"/>
-                </a:solidFill>
-                <a:latin typeface="Consolas"/>
-              </a:rPr>
-              <a:t>genai</a:t>
-            </a:r>
-            <a:r>
-              <a:rPr sz="950" b="0" i="0">
-                <a:solidFill>
-                  <a:srgbClr val="3F3F46"/>
-                </a:solidFill>
-                <a:latin typeface="Consolas"/>
-              </a:rPr>
-              <a:t>.</a:t>
-            </a:r>
-            <a:r>
-              <a:rPr sz="950" b="0" i="0">
-                <a:solidFill>
-                  <a:srgbClr val="18181B"/>
-                </a:solidFill>
-                <a:latin typeface="Consolas"/>
-              </a:rPr>
-              <a:t>Client</a:t>
-            </a:r>
-            <a:r>
-              <a:rPr sz="950" b="0" i="0">
-                <a:solidFill>
-                  <a:srgbClr val="3F3F46"/>
-                </a:solidFill>
-                <a:latin typeface="Consolas"/>
-              </a:rPr>
-              <a:t>(</a:t>
-            </a:r>
-            <a:r>
-              <a:rPr sz="950" b="0" i="0">
-                <a:solidFill>
-                  <a:srgbClr val="3F3F46"/>
-                </a:solidFill>
-                <a:latin typeface="Consolas"/>
-              </a:rPr>
-              <a:t>)</a:t>
-            </a:r>
-          </a:p>
-          <a:p>
-            <a:pPr>
-              <a:spcAft>
-                <a:spcPts val="200"/>
-              </a:spcAft>
-            </a:pPr>
-          </a:p>
-          <a:p>
-            <a:pPr>
-              <a:spcAft>
-                <a:spcPts val="200"/>
-              </a:spcAft>
-            </a:pPr>
-            <a:r>
-              <a:rPr sz="950" b="0" i="1">
-                <a:solidFill>
-                  <a:srgbClr val="71717A"/>
-                </a:solidFill>
-                <a:latin typeface="Consolas"/>
-              </a:rPr>
-              <a:t># Generate grounded text using Gemini 1.5 Flash</a:t>
-            </a:r>
-          </a:p>
-          <a:p>
-            <a:pPr>
-              <a:spcAft>
-                <a:spcPts val="200"/>
-              </a:spcAft>
-            </a:pPr>
-            <a:r>
-              <a:rPr sz="950" b="0" i="0">
-                <a:solidFill>
-                  <a:srgbClr val="18181B"/>
-                </a:solidFill>
-                <a:latin typeface="Consolas"/>
-              </a:rPr>
-              <a:t>response</a:t>
-            </a:r>
-            <a:r>
-              <a:rPr sz="950" b="0" i="0">
-                <a:solidFill>
-                  <a:srgbClr val="3F3F46"/>
-                </a:solidFill>
-                <a:latin typeface="Consolas"/>
-              </a:rPr>
-              <a:t> </a:t>
-            </a:r>
-            <a:r>
-              <a:rPr sz="950" b="0" i="0">
-                <a:solidFill>
-                  <a:srgbClr val="3F3F46"/>
-                </a:solidFill>
-                <a:latin typeface="Consolas"/>
-              </a:rPr>
-              <a:t>=</a:t>
-            </a:r>
-            <a:r>
-              <a:rPr sz="950" b="0" i="0">
-                <a:solidFill>
-                  <a:srgbClr val="3F3F46"/>
-                </a:solidFill>
-                <a:latin typeface="Consolas"/>
-              </a:rPr>
-              <a:t> </a:t>
-            </a:r>
-            <a:r>
-              <a:rPr sz="950" b="0" i="0">
-                <a:solidFill>
-                  <a:srgbClr val="18181B"/>
-                </a:solidFill>
-                <a:latin typeface="Consolas"/>
-              </a:rPr>
-              <a:t>client</a:t>
-            </a:r>
-            <a:r>
-              <a:rPr sz="950" b="0" i="0">
-                <a:solidFill>
-                  <a:srgbClr val="3F3F46"/>
-                </a:solidFill>
-                <a:latin typeface="Consolas"/>
-              </a:rPr>
-              <a:t>.</a:t>
-            </a:r>
-            <a:r>
-              <a:rPr sz="950" b="0" i="0">
-                <a:solidFill>
-                  <a:srgbClr val="18181B"/>
-                </a:solidFill>
-                <a:latin typeface="Consolas"/>
-              </a:rPr>
-              <a:t>models</a:t>
-            </a:r>
-            <a:r>
-              <a:rPr sz="950" b="0" i="0">
-                <a:solidFill>
-                  <a:srgbClr val="3F3F46"/>
-                </a:solidFill>
-                <a:latin typeface="Consolas"/>
-              </a:rPr>
-              <a:t>.</a:t>
-            </a:r>
-            <a:r>
-              <a:rPr sz="950" b="0" i="0">
-                <a:solidFill>
-                  <a:srgbClr val="18181B"/>
-                </a:solidFill>
-                <a:latin typeface="Consolas"/>
-              </a:rPr>
-              <a:t>generate_content</a:t>
-            </a:r>
-            <a:r>
-              <a:rPr sz="950" b="0" i="0">
-                <a:solidFill>
-                  <a:srgbClr val="3F3F46"/>
-                </a:solidFill>
-                <a:latin typeface="Consolas"/>
-              </a:rPr>
-              <a:t>(</a:t>
-            </a:r>
-          </a:p>
-          <a:p>
-            <a:pPr>
-              <a:spcAft>
-                <a:spcPts val="200"/>
-              </a:spcAft>
-            </a:pPr>
-            <a:r>
-              <a:rPr sz="950" b="0" i="0">
-                <a:solidFill>
-                  <a:srgbClr val="3F3F46"/>
-                </a:solidFill>
-                <a:latin typeface="Consolas"/>
-              </a:rPr>
-              <a:t> </a:t>
-            </a:r>
-            <a:r>
-              <a:rPr sz="950" b="0" i="0">
-                <a:solidFill>
-                  <a:srgbClr val="3F3F46"/>
-                </a:solidFill>
-                <a:latin typeface="Consolas"/>
-              </a:rPr>
-              <a:t> </a:t>
-            </a:r>
-            <a:r>
-              <a:rPr sz="950" b="0" i="0">
-                <a:solidFill>
-                  <a:srgbClr val="3F3F46"/>
-                </a:solidFill>
-                <a:latin typeface="Consolas"/>
-              </a:rPr>
-              <a:t> </a:t>
-            </a:r>
-            <a:r>
-              <a:rPr sz="950" b="0" i="0">
-                <a:solidFill>
-                  <a:srgbClr val="3F3F46"/>
-                </a:solidFill>
-                <a:latin typeface="Consolas"/>
-              </a:rPr>
-              <a:t> </a:t>
-            </a:r>
-            <a:r>
-              <a:rPr sz="950" b="0" i="0">
-                <a:solidFill>
-                  <a:srgbClr val="18181B"/>
-                </a:solidFill>
-                <a:latin typeface="Consolas"/>
-              </a:rPr>
-              <a:t>model</a:t>
-            </a:r>
-            <a:r>
-              <a:rPr sz="950" b="0" i="0">
-                <a:solidFill>
-                  <a:srgbClr val="3F3F46"/>
-                </a:solidFill>
-                <a:latin typeface="Consolas"/>
-              </a:rPr>
-              <a:t>=</a:t>
-            </a:r>
-            <a:r>
-              <a:rPr sz="950" b="0" i="0">
-                <a:solidFill>
-                  <a:srgbClr val="047857"/>
-                </a:solidFill>
-                <a:latin typeface="Consolas"/>
-              </a:rPr>
-              <a:t>"gemini-1.5-flash"</a:t>
-            </a:r>
-            <a:r>
-              <a:rPr sz="950" b="0" i="0">
-                <a:solidFill>
-                  <a:srgbClr val="3F3F46"/>
-                </a:solidFill>
-                <a:latin typeface="Consolas"/>
-              </a:rPr>
-              <a:t>,</a:t>
-            </a:r>
-          </a:p>
-          <a:p>
-            <a:pPr>
-              <a:spcAft>
-                <a:spcPts val="200"/>
-              </a:spcAft>
-            </a:pPr>
-            <a:r>
-              <a:rPr sz="950" b="0" i="0">
-                <a:solidFill>
-                  <a:srgbClr val="3F3F46"/>
-                </a:solidFill>
-                <a:latin typeface="Consolas"/>
-              </a:rPr>
-              <a:t> </a:t>
-            </a:r>
-            <a:r>
-              <a:rPr sz="950" b="0" i="0">
-                <a:solidFill>
-                  <a:srgbClr val="3F3F46"/>
-                </a:solidFill>
-                <a:latin typeface="Consolas"/>
-              </a:rPr>
-              <a:t> </a:t>
-            </a:r>
-            <a:r>
-              <a:rPr sz="950" b="0" i="0">
-                <a:solidFill>
-                  <a:srgbClr val="3F3F46"/>
-                </a:solidFill>
-                <a:latin typeface="Consolas"/>
-              </a:rPr>
-              <a:t> </a:t>
-            </a:r>
-            <a:r>
-              <a:rPr sz="950" b="0" i="0">
-                <a:solidFill>
-                  <a:srgbClr val="3F3F46"/>
-                </a:solidFill>
-                <a:latin typeface="Consolas"/>
-              </a:rPr>
-              <a:t> </a:t>
-            </a:r>
-            <a:r>
-              <a:rPr sz="950" b="0" i="0">
-                <a:solidFill>
-                  <a:srgbClr val="18181B"/>
-                </a:solidFill>
-                <a:latin typeface="Consolas"/>
-              </a:rPr>
-              <a:t>contents</a:t>
-            </a:r>
-            <a:r>
-              <a:rPr sz="950" b="0" i="0">
-                <a:solidFill>
-                  <a:srgbClr val="3F3F46"/>
-                </a:solidFill>
-                <a:latin typeface="Consolas"/>
-              </a:rPr>
-              <a:t>=</a:t>
-            </a:r>
-            <a:r>
-              <a:rPr sz="950" b="0" i="0">
-                <a:solidFill>
-                  <a:srgbClr val="047857"/>
-                </a:solidFill>
-                <a:latin typeface="Consolas"/>
-              </a:rPr>
-              <a:t>"What is the self-attention mechanism in Transformers?"</a:t>
-            </a:r>
-            <a:r>
-              <a:rPr sz="950" b="0" i="0">
-                <a:solidFill>
-                  <a:srgbClr val="3F3F46"/>
-                </a:solidFill>
-                <a:latin typeface="Consolas"/>
-              </a:rPr>
-              <a:t>,</a:t>
-            </a:r>
-          </a:p>
-          <a:p>
-            <a:pPr>
-              <a:spcAft>
-                <a:spcPts val="200"/>
-              </a:spcAft>
-            </a:pPr>
-            <a:r>
-              <a:rPr sz="950" b="0" i="0">
-                <a:solidFill>
-                  <a:srgbClr val="3F3F46"/>
-                </a:solidFill>
-                <a:latin typeface="Consolas"/>
-              </a:rPr>
-              <a:t> </a:t>
-            </a:r>
-            <a:r>
-              <a:rPr sz="950" b="0" i="0">
-                <a:solidFill>
-                  <a:srgbClr val="3F3F46"/>
-                </a:solidFill>
-                <a:latin typeface="Consolas"/>
-              </a:rPr>
-              <a:t> </a:t>
-            </a:r>
-            <a:r>
-              <a:rPr sz="950" b="0" i="0">
-                <a:solidFill>
-                  <a:srgbClr val="3F3F46"/>
-                </a:solidFill>
-                <a:latin typeface="Consolas"/>
-              </a:rPr>
-              <a:t> </a:t>
-            </a:r>
-            <a:r>
-              <a:rPr sz="950" b="0" i="0">
-                <a:solidFill>
-                  <a:srgbClr val="3F3F46"/>
-                </a:solidFill>
-                <a:latin typeface="Consolas"/>
-              </a:rPr>
-              <a:t> </a:t>
-            </a:r>
-            <a:r>
-              <a:rPr sz="950" b="0" i="0">
-                <a:solidFill>
-                  <a:srgbClr val="18181B"/>
-                </a:solidFill>
-                <a:latin typeface="Consolas"/>
-              </a:rPr>
-              <a:t>config</a:t>
-            </a:r>
-            <a:r>
-              <a:rPr sz="950" b="0" i="0">
-                <a:solidFill>
-                  <a:srgbClr val="3F3F46"/>
-                </a:solidFill>
-                <a:latin typeface="Consolas"/>
-              </a:rPr>
-              <a:t>=</a:t>
-            </a:r>
-            <a:r>
-              <a:rPr sz="950" b="0" i="0">
-                <a:solidFill>
-                  <a:srgbClr val="18181B"/>
-                </a:solidFill>
-                <a:latin typeface="Consolas"/>
-              </a:rPr>
-              <a:t>types</a:t>
-            </a:r>
-            <a:r>
-              <a:rPr sz="950" b="0" i="0">
-                <a:solidFill>
-                  <a:srgbClr val="3F3F46"/>
-                </a:solidFill>
-                <a:latin typeface="Consolas"/>
-              </a:rPr>
-              <a:t>.</a:t>
-            </a:r>
-            <a:r>
-              <a:rPr sz="950" b="0" i="0">
-                <a:solidFill>
-                  <a:srgbClr val="18181B"/>
-                </a:solidFill>
-                <a:latin typeface="Consolas"/>
-              </a:rPr>
-              <a:t>GenerateContentConfig</a:t>
-            </a:r>
-            <a:r>
-              <a:rPr sz="950" b="0" i="0">
-                <a:solidFill>
-                  <a:srgbClr val="3F3F46"/>
-                </a:solidFill>
-                <a:latin typeface="Consolas"/>
-              </a:rPr>
-              <a:t>(</a:t>
-            </a:r>
-          </a:p>
-          <a:p>
-            <a:pPr>
-              <a:spcAft>
-                <a:spcPts val="200"/>
-              </a:spcAft>
-            </a:pPr>
-            <a:r>
-              <a:rPr sz="950" b="0" i="0">
-                <a:solidFill>
-                  <a:srgbClr val="3F3F46"/>
-                </a:solidFill>
-                <a:latin typeface="Consolas"/>
-              </a:rPr>
-              <a:t> </a:t>
-            </a:r>
-            <a:r>
-              <a:rPr sz="950" b="0" i="0">
-                <a:solidFill>
-                  <a:srgbClr val="3F3F46"/>
-                </a:solidFill>
-                <a:latin typeface="Consolas"/>
-              </a:rPr>
-              <a:t> </a:t>
-            </a:r>
-            <a:r>
-              <a:rPr sz="950" b="0" i="0">
-                <a:solidFill>
-                  <a:srgbClr val="3F3F46"/>
-                </a:solidFill>
-                <a:latin typeface="Consolas"/>
-              </a:rPr>
-              <a:t> </a:t>
-            </a:r>
-            <a:r>
-              <a:rPr sz="950" b="0" i="0">
-                <a:solidFill>
-                  <a:srgbClr val="3F3F46"/>
-                </a:solidFill>
-                <a:latin typeface="Consolas"/>
-              </a:rPr>
-              <a:t> </a:t>
-            </a:r>
-            <a:r>
-              <a:rPr sz="950" b="0" i="0">
-                <a:solidFill>
-                  <a:srgbClr val="3F3F46"/>
-                </a:solidFill>
-                <a:latin typeface="Consolas"/>
-              </a:rPr>
-              <a:t> </a:t>
-            </a:r>
-            <a:r>
-              <a:rPr sz="950" b="0" i="0">
-                <a:solidFill>
-                  <a:srgbClr val="3F3F46"/>
-                </a:solidFill>
-                <a:latin typeface="Consolas"/>
-              </a:rPr>
-              <a:t> </a:t>
-            </a:r>
-            <a:r>
-              <a:rPr sz="950" b="0" i="0">
-                <a:solidFill>
-                  <a:srgbClr val="3F3F46"/>
-                </a:solidFill>
-                <a:latin typeface="Consolas"/>
-              </a:rPr>
-              <a:t> </a:t>
-            </a:r>
-            <a:r>
-              <a:rPr sz="950" b="0" i="0">
-                <a:solidFill>
-                  <a:srgbClr val="3F3F46"/>
-                </a:solidFill>
-                <a:latin typeface="Consolas"/>
-              </a:rPr>
-              <a:t> </a:t>
-            </a:r>
-            <a:r>
-              <a:rPr sz="950" b="0" i="0">
-                <a:solidFill>
-                  <a:srgbClr val="18181B"/>
-                </a:solidFill>
-                <a:latin typeface="Consolas"/>
-              </a:rPr>
-              <a:t>temperature</a:t>
-            </a:r>
-            <a:r>
-              <a:rPr sz="950" b="0" i="0">
-                <a:solidFill>
-                  <a:srgbClr val="3F3F46"/>
-                </a:solidFill>
-                <a:latin typeface="Consolas"/>
-              </a:rPr>
-              <a:t>=</a:t>
-            </a:r>
-            <a:r>
-              <a:rPr sz="950" b="0" i="0">
-                <a:solidFill>
-                  <a:srgbClr val="1D4ED8"/>
-                </a:solidFill>
-                <a:latin typeface="Consolas"/>
-              </a:rPr>
-              <a:t>0</a:t>
-            </a:r>
-            <a:r>
-              <a:rPr sz="950" b="0" i="0">
-                <a:solidFill>
-                  <a:srgbClr val="3F3F46"/>
-                </a:solidFill>
-                <a:latin typeface="Consolas"/>
-              </a:rPr>
-              <a:t>.</a:t>
-            </a:r>
-            <a:r>
-              <a:rPr sz="950" b="0" i="0">
-                <a:solidFill>
-                  <a:srgbClr val="1D4ED8"/>
-                </a:solidFill>
-                <a:latin typeface="Consolas"/>
-              </a:rPr>
-              <a:t>2</a:t>
-            </a:r>
-            <a:r>
-              <a:rPr sz="950" b="0" i="0">
-                <a:solidFill>
-                  <a:srgbClr val="3F3F46"/>
-                </a:solidFill>
-                <a:latin typeface="Consolas"/>
-              </a:rPr>
-              <a:t>,</a:t>
-            </a:r>
-          </a:p>
-          <a:p>
-            <a:pPr>
-              <a:spcAft>
-                <a:spcPts val="200"/>
-              </a:spcAft>
-            </a:pPr>
-            <a:r>
-              <a:rPr sz="950" b="0" i="0">
-                <a:solidFill>
-                  <a:srgbClr val="3F3F46"/>
-                </a:solidFill>
-                <a:latin typeface="Consolas"/>
-              </a:rPr>
-              <a:t> </a:t>
-            </a:r>
-            <a:r>
-              <a:rPr sz="950" b="0" i="0">
-                <a:solidFill>
-                  <a:srgbClr val="3F3F46"/>
-                </a:solidFill>
-                <a:latin typeface="Consolas"/>
-              </a:rPr>
-              <a:t> </a:t>
-            </a:r>
-            <a:r>
-              <a:rPr sz="950" b="0" i="0">
-                <a:solidFill>
-                  <a:srgbClr val="3F3F46"/>
-                </a:solidFill>
-                <a:latin typeface="Consolas"/>
-              </a:rPr>
-              <a:t> </a:t>
-            </a:r>
-            <a:r>
-              <a:rPr sz="950" b="0" i="0">
-                <a:solidFill>
-                  <a:srgbClr val="3F3F46"/>
-                </a:solidFill>
-                <a:latin typeface="Consolas"/>
-              </a:rPr>
-              <a:t> </a:t>
-            </a:r>
-            <a:r>
-              <a:rPr sz="950" b="0" i="0">
-                <a:solidFill>
-                  <a:srgbClr val="3F3F46"/>
-                </a:solidFill>
-                <a:latin typeface="Consolas"/>
-              </a:rPr>
-              <a:t> </a:t>
-            </a:r>
-            <a:r>
-              <a:rPr sz="950" b="0" i="0">
-                <a:solidFill>
-                  <a:srgbClr val="3F3F46"/>
-                </a:solidFill>
-                <a:latin typeface="Consolas"/>
-              </a:rPr>
-              <a:t> </a:t>
-            </a:r>
-            <a:r>
-              <a:rPr sz="950" b="0" i="0">
-                <a:solidFill>
-                  <a:srgbClr val="3F3F46"/>
-                </a:solidFill>
-                <a:latin typeface="Consolas"/>
-              </a:rPr>
-              <a:t> </a:t>
-            </a:r>
-            <a:r>
-              <a:rPr sz="950" b="0" i="0">
-                <a:solidFill>
-                  <a:srgbClr val="3F3F46"/>
-                </a:solidFill>
-                <a:latin typeface="Consolas"/>
-              </a:rPr>
-              <a:t> </a:t>
-            </a:r>
-            <a:r>
-              <a:rPr sz="950" b="0" i="0">
-                <a:solidFill>
-                  <a:srgbClr val="18181B"/>
-                </a:solidFill>
-                <a:latin typeface="Consolas"/>
-              </a:rPr>
-              <a:t>system_instruction</a:t>
-            </a:r>
-            <a:r>
-              <a:rPr sz="950" b="0" i="0">
-                <a:solidFill>
-                  <a:srgbClr val="3F3F46"/>
-                </a:solidFill>
-                <a:latin typeface="Consolas"/>
-              </a:rPr>
-              <a:t>=</a:t>
-            </a:r>
-            <a:r>
-              <a:rPr sz="950" b="0" i="0">
-                <a:solidFill>
-                  <a:srgbClr val="047857"/>
-                </a:solidFill>
-                <a:latin typeface="Consolas"/>
-              </a:rPr>
-              <a:t>"You are an expert GCP ML Certification Instructor."</a:t>
-            </a:r>
-          </a:p>
-          <a:p>
-            <a:pPr>
-              <a:spcAft>
-                <a:spcPts val="200"/>
-              </a:spcAft>
-            </a:pPr>
-            <a:r>
-              <a:rPr sz="950" b="0" i="0">
-                <a:solidFill>
-                  <a:srgbClr val="3F3F46"/>
-                </a:solidFill>
-                <a:latin typeface="Consolas"/>
-              </a:rPr>
-              <a:t> </a:t>
-            </a:r>
-            <a:r>
-              <a:rPr sz="950" b="0" i="0">
-                <a:solidFill>
-                  <a:srgbClr val="3F3F46"/>
-                </a:solidFill>
-                <a:latin typeface="Consolas"/>
-              </a:rPr>
-              <a:t> </a:t>
-            </a:r>
-            <a:r>
-              <a:rPr sz="950" b="0" i="0">
-                <a:solidFill>
-                  <a:srgbClr val="3F3F46"/>
-                </a:solidFill>
-                <a:latin typeface="Consolas"/>
-              </a:rPr>
-              <a:t> </a:t>
-            </a:r>
-            <a:r>
-              <a:rPr sz="950" b="0" i="0">
-                <a:solidFill>
-                  <a:srgbClr val="3F3F46"/>
-                </a:solidFill>
-                <a:latin typeface="Consolas"/>
-              </a:rPr>
-              <a:t> </a:t>
-            </a:r>
-            <a:r>
-              <a:rPr sz="950" b="0" i="0">
-                <a:solidFill>
-                  <a:srgbClr val="3F3F46"/>
-                </a:solidFill>
-                <a:latin typeface="Consolas"/>
-              </a:rPr>
-              <a:t>)</a:t>
-            </a:r>
-          </a:p>
-          <a:p>
-            <a:pPr>
-              <a:spcAft>
-                <a:spcPts val="200"/>
-              </a:spcAft>
-            </a:pPr>
-            <a:r>
-              <a:rPr sz="950" b="0" i="0">
-                <a:solidFill>
-                  <a:srgbClr val="3F3F46"/>
-                </a:solidFill>
-                <a:latin typeface="Consolas"/>
-              </a:rPr>
-              <a:t>)</a:t>
-            </a:r>
-          </a:p>
-          <a:p>
-            <a:pPr>
-              <a:spcAft>
-                <a:spcPts val="200"/>
-              </a:spcAft>
-            </a:pPr>
-            <a:r>
-              <a:rPr sz="950" b="1" i="0">
-                <a:solidFill>
-                  <a:srgbClr val="BE185D"/>
-                </a:solidFill>
-                <a:latin typeface="Consolas"/>
-              </a:rPr>
-              <a:t>print</a:t>
-            </a:r>
-            <a:r>
-              <a:rPr sz="950" b="0" i="0">
-                <a:solidFill>
-                  <a:srgbClr val="3F3F46"/>
-                </a:solidFill>
-                <a:latin typeface="Consolas"/>
-              </a:rPr>
-              <a:t>(</a:t>
-            </a:r>
-            <a:r>
-              <a:rPr sz="950" b="0" i="0">
-                <a:solidFill>
-                  <a:srgbClr val="18181B"/>
-                </a:solidFill>
-                <a:latin typeface="Consolas"/>
-              </a:rPr>
-              <a:t>response</a:t>
-            </a:r>
-            <a:r>
-              <a:rPr sz="950" b="0" i="0">
-                <a:solidFill>
-                  <a:srgbClr val="3F3F46"/>
-                </a:solidFill>
-                <a:latin typeface="Consolas"/>
-              </a:rPr>
-              <a:t>.</a:t>
-            </a:r>
-            <a:r>
-              <a:rPr sz="950" b="0" i="0">
-                <a:solidFill>
-                  <a:srgbClr val="18181B"/>
-                </a:solidFill>
-                <a:latin typeface="Consolas"/>
-              </a:rPr>
-              <a:t>text</a:t>
-            </a:r>
-            <a:r>
-              <a:rPr sz="950" b="0" i="0">
-                <a:solidFill>
-                  <a:srgbClr val="3F3F46"/>
-                </a:solidFill>
-                <a:latin typeface="Consolas"/>
-              </a:rPr>
-              <a:t>)</a:t>
-            </a:r>
-          </a:p>
-        </p:txBody>
-      </p:sp>
-      <p:sp>
-        <p:nvSpPr>
-          <p:cNvPr id="6" name="Rectangle 5"/>
-          <p:cNvSpPr/>
-          <p:nvPr/>
-        </p:nvSpPr>
-        <p:spPr>
-          <a:xfrm>
-            <a:off x="731520" y="5029200"/>
-            <a:ext cx="10725912" cy="1097280"/>
+            <a:off x="731520" y="4754880"/>
+            <a:ext cx="6217920" cy="1371600"/>
           </a:xfrm>
           <a:prstGeom prst="rect">
             <a:avLst/>
@@ -8635,7 +9930,76 @@
                 </a:solidFill>
                 <a:latin typeface="Segoe UI"/>
               </a:rPr>
-              <a:t>This code is used inside web services to call Gemini. Configuring low temperature (0.2) and clear system instructions guarantees focused, fact-grounded responses for API callers.</a:t>
+              <a:t>An input prompt contains toxic patterns. The Vertex AI safety layer intercepts the request, blocks execution, and returns a structured response indicating a blocked classification.</a:t>
+            </a:r>
+          </a:p>
+        </p:txBody>
+      </p:sp>
+      <p:sp>
+        <p:nvSpPr>
+          <p:cNvPr id="6" name="Rounded Rectangle 5"/>
+          <p:cNvSpPr/>
+          <p:nvPr/>
+        </p:nvSpPr>
+        <p:spPr>
+          <a:xfrm>
+            <a:off x="7315200" y="1645920"/>
+            <a:ext cx="4114800" cy="4480560"/>
+          </a:xfrm>
+          <a:prstGeom prst="roundRect">
+            <a:avLst/>
+          </a:prstGeom>
+          <a:solidFill>
+            <a:srgbClr val="FFFFFF"/>
+          </a:solidFill>
+          <a:ln w="15240">
+            <a:solidFill>
+              <a:srgbClr val="D4D4D8"/>
+            </a:solidFill>
+          </a:ln>
+        </p:spPr>
+        <p:style>
+          <a:lnRef idx="1">
+            <a:schemeClr val="accent1"/>
+          </a:lnRef>
+          <a:fillRef idx="3">
+            <a:schemeClr val="accent1"/>
+          </a:fillRef>
+          <a:effectRef idx="2">
+            <a:schemeClr val="accent1"/>
+          </a:effectRef>
+          <a:fontRef idx="minor">
+            <a:schemeClr val="lt1"/>
+          </a:fontRef>
+        </p:style>
+        <p:txBody>
+          <a:bodyPr rtlCol="0" anchor="ctr" wrap="square" lIns="228600" rIns="228600" tIns="182880" bIns="182880"/>
+          <a:lstStyle/>
+          <a:p>
+            <a:pPr algn="ctr">
+              <a:spcAft>
+                <a:spcPts val="1200"/>
+              </a:spcAft>
+            </a:pPr>
+            <a:r>
+              <a:rPr sz="1600" b="1" i="0">
+                <a:solidFill>
+                  <a:srgbClr val="18181B"/>
+                </a:solidFill>
+                <a:latin typeface="Segoe UI"/>
+              </a:rPr>
+              <a:t>MLOps Operations Loop</a:t>
+            </a:r>
+          </a:p>
+          <a:p>
+            <a:r>
+              <a:rPr sz="1150" b="0" i="0">
+                <a:solidFill>
+                  <a:srgbClr val="3F3F46"/>
+                </a:solidFill>
+                <a:latin typeface="Segoe UI"/>
+              </a:rPr>
+              <a:t>Deploying models in production requires active validation loops. Integrating safety checks in the prediction pipeline prevents reputation risks, toxic outputs, and jailbreak exploits.</a:t>
             </a:r>
           </a:p>
         </p:txBody>
@@ -8695,7 +10059,7 @@
                 </a:solidFill>
                 <a:latin typeface="Segoe UI"/>
               </a:rPr>
-              <a:t>OPERATIONS GUIDE</a:t>
+              <a:t>TAKEAWAYS</a:t>
             </a:r>
           </a:p>
         </p:txBody>
@@ -8729,7 +10093,7 @@
                 </a:solidFill>
                 <a:latin typeface="Segoe UI"/>
               </a:rPr>
-              <a:t>Google Cloud CLI &amp; Curl Reference</a:t>
+              <a:t>Architect's Checklist</a:t>
             </a:r>
           </a:p>
         </p:txBody>
@@ -8742,8 +10106,8 @@
         </p:nvSpPr>
         <p:spPr>
           <a:xfrm>
-            <a:off x="731520" y="1280160"/>
-            <a:ext cx="10698480" cy="365760"/>
+            <a:off x="731520" y="1645920"/>
+            <a:ext cx="6217920" cy="2926080"/>
           </a:xfrm>
           <a:prstGeom prst="rect">
             <a:avLst/>
@@ -8751,19 +10115,144 @@
           <a:noFill/>
         </p:spPr>
         <p:txBody>
-          <a:bodyPr wrap="none">
+          <a:bodyPr wrap="square" lIns="0" rIns="0" tIns="0" bIns="0">
             <a:spAutoFit/>
           </a:bodyPr>
           <a:lstStyle/>
           <a:p>
-            <a:r>
-              <a:rPr sz="1300" b="0" i="0">
+            <a:pPr>
+              <a:spcAft>
+                <a:spcPts val="1200"/>
+              </a:spcAft>
+            </a:pPr>
+            <a:r>
+              <a:rPr sz="1300" b="1" i="0">
+                <a:solidFill>
+                  <a:srgbClr val="1D4ED8"/>
+                </a:solidFill>
+                <a:latin typeface="Segoe UI"/>
+              </a:rPr>
+              <a:t>→  </a:t>
+            </a:r>
+            <a:r>
+              <a:rPr sz="1250" b="1" i="0">
                 <a:solidFill>
                   <a:srgbClr val="18181B"/>
                 </a:solidFill>
                 <a:latin typeface="Segoe UI"/>
               </a:rPr>
-              <a:t>Interacting with Vertex AI model endpoints directly via command line and curl:</a:t>
+              <a:t>Zero-Shot/Few-Shot: </a:t>
+            </a:r>
+            <a:r>
+              <a:rPr sz="1250" b="0" i="0">
+                <a:solidFill>
+                  <a:srgbClr val="3F3F46"/>
+                </a:solidFill>
+                <a:latin typeface="Segoe UI"/>
+              </a:rPr>
+              <a:t>First attempt prompting configurations before investing in custom parameter tuning.</a:t>
+            </a:r>
+          </a:p>
+          <a:p>
+            <a:pPr>
+              <a:spcAft>
+                <a:spcPts val="1200"/>
+              </a:spcAft>
+            </a:pPr>
+            <a:r>
+              <a:rPr sz="1300" b="1" i="0">
+                <a:solidFill>
+                  <a:srgbClr val="1D4ED8"/>
+                </a:solidFill>
+                <a:latin typeface="Segoe UI"/>
+              </a:rPr>
+              <a:t>→  </a:t>
+            </a:r>
+            <a:r>
+              <a:rPr sz="1250" b="1" i="0">
+                <a:solidFill>
+                  <a:srgbClr val="18181B"/>
+                </a:solidFill>
+                <a:latin typeface="Segoe UI"/>
+              </a:rPr>
+              <a:t>Retrieval-Augmented Gen: </a:t>
+            </a:r>
+            <a:r>
+              <a:rPr sz="1250" b="0" i="0">
+                <a:solidFill>
+                  <a:srgbClr val="3F3F46"/>
+                </a:solidFill>
+                <a:latin typeface="Segoe UI"/>
+              </a:rPr>
+              <a:t>Ground models using Vector Search to mitigate hallucinations and present fresh datasets.</a:t>
+            </a:r>
+          </a:p>
+          <a:p>
+            <a:pPr>
+              <a:spcAft>
+                <a:spcPts val="1200"/>
+              </a:spcAft>
+            </a:pPr>
+            <a:r>
+              <a:rPr sz="1300" b="1" i="0">
+                <a:solidFill>
+                  <a:srgbClr val="1D4ED8"/>
+                </a:solidFill>
+                <a:latin typeface="Segoe UI"/>
+              </a:rPr>
+              <a:t>→  </a:t>
+            </a:r>
+            <a:r>
+              <a:rPr sz="1250" b="1" i="0">
+                <a:solidFill>
+                  <a:srgbClr val="18181B"/>
+                </a:solidFill>
+                <a:latin typeface="Segoe UI"/>
+              </a:rPr>
+              <a:t>Cost/Latency: </a:t>
+            </a:r>
+            <a:r>
+              <a:rPr sz="1250" b="0" i="0">
+                <a:solidFill>
+                  <a:srgbClr val="3F3F46"/>
+                </a:solidFill>
+                <a:latin typeface="Segoe UI"/>
+              </a:rPr>
+              <a:t>Select Gemini Flash for quick, budget serving. Reserve Pro for complex reasoning.</a:t>
+            </a:r>
+          </a:p>
+          <a:p>
+            <a:pPr>
+              <a:spcAft>
+                <a:spcPts val="1200"/>
+              </a:spcAft>
+            </a:pPr>
+            <a:r>
+              <a:rPr sz="1300" b="1" i="0">
+                <a:solidFill>
+                  <a:srgbClr val="1D4ED8"/>
+                </a:solidFill>
+                <a:latin typeface="Segoe UI"/>
+              </a:rPr>
+              <a:t>→  </a:t>
+            </a:r>
+            <a:r>
+              <a:rPr sz="1250" b="1" i="0">
+                <a:solidFill>
+                  <a:srgbClr val="18181B"/>
+                </a:solidFill>
+                <a:latin typeface="Segoe UI"/>
+              </a:rPr>
+              <a:t>Governance: </a:t>
+            </a:r>
+            <a:r>
+              <a:rPr sz="1250" b="0" i="0">
+                <a:solidFill>
+                  <a:srgbClr val="3F3F46"/>
+                </a:solidFill>
+                <a:latin typeface="Segoe UI"/>
+              </a:rPr>
+              <a:t>Enforce IAM role boundaries and safety filter limits at the endpoint level.</a:t>
             </a:r>
           </a:p>
         </p:txBody>
@@ -8776,599 +10265,8 @@
         </p:nvSpPr>
         <p:spPr>
           <a:xfrm>
-            <a:off x="731520" y="1737360"/>
-            <a:ext cx="10725912" cy="3108960"/>
-          </a:xfrm>
-          <a:prstGeom prst="rect">
-            <a:avLst/>
-          </a:prstGeom>
-          <a:solidFill>
-            <a:srgbClr val="F4F4F5"/>
-          </a:solidFill>
-          <a:ln w="12700">
-            <a:solidFill>
-              <a:srgbClr val="D4D4D8"/>
-            </a:solidFill>
-          </a:ln>
-        </p:spPr>
-        <p:style>
-          <a:lnRef idx="1">
-            <a:schemeClr val="accent1"/>
-          </a:lnRef>
-          <a:fillRef idx="3">
-            <a:schemeClr val="accent1"/>
-          </a:fillRef>
-          <a:effectRef idx="2">
-            <a:schemeClr val="accent1"/>
-          </a:effectRef>
-          <a:fontRef idx="minor">
-            <a:schemeClr val="lt1"/>
-          </a:fontRef>
-        </p:style>
-        <p:txBody>
-          <a:bodyPr rtlCol="0" anchor="ctr" wrap="square" lIns="228600" rIns="228600" tIns="182880" bIns="182880"/>
-          <a:lstStyle/>
-          <a:p>
-            <a:pPr algn="ctr">
-              <a:spcAft>
-                <a:spcPts val="200"/>
-              </a:spcAft>
-            </a:pPr>
-            <a:r>
-              <a:rPr sz="950" b="0" i="1">
-                <a:solidFill>
-                  <a:srgbClr val="71717A"/>
-                </a:solidFill>
-                <a:latin typeface="Consolas"/>
-              </a:rPr>
-              <a:t># Call Gemini API via curl using gcloud authorization tokens</a:t>
-            </a:r>
-          </a:p>
-          <a:p>
-            <a:pPr>
-              <a:spcAft>
-                <a:spcPts val="200"/>
-              </a:spcAft>
-            </a:pPr>
-            <a:r>
-              <a:rPr sz="950" b="0" i="0">
-                <a:solidFill>
-                  <a:srgbClr val="1D4ED8"/>
-                </a:solidFill>
-                <a:latin typeface="Consolas"/>
-              </a:rPr>
-              <a:t>curl </a:t>
-            </a:r>
-            <a:r>
-              <a:rPr sz="950" b="0" i="0">
-                <a:solidFill>
-                  <a:srgbClr val="BE185D"/>
-                </a:solidFill>
-                <a:latin typeface="Consolas"/>
-              </a:rPr>
-              <a:t>-X </a:t>
-            </a:r>
-            <a:r>
-              <a:rPr sz="950" b="0" i="0">
-                <a:solidFill>
-                  <a:srgbClr val="18181B"/>
-                </a:solidFill>
-                <a:latin typeface="Consolas"/>
-              </a:rPr>
-              <a:t>POST </a:t>
-            </a:r>
-            <a:r>
-              <a:rPr sz="950" b="0" i="0">
-                <a:solidFill>
-                  <a:srgbClr val="18181B"/>
-                </a:solidFill>
-                <a:latin typeface="Consolas"/>
-              </a:rPr>
-              <a:t>\</a:t>
-            </a:r>
-          </a:p>
-          <a:p>
-            <a:pPr>
-              <a:spcAft>
-                <a:spcPts val="200"/>
-              </a:spcAft>
-            </a:pPr>
-            <a:r>
-              <a:rPr sz="950" b="0" i="0">
-                <a:solidFill>
-                  <a:srgbClr val="18181B"/>
-                </a:solidFill>
-                <a:latin typeface="Consolas"/>
-              </a:rPr>
-              <a:t> </a:t>
-            </a:r>
-            <a:r>
-              <a:rPr sz="950" b="0" i="0">
-                <a:solidFill>
-                  <a:srgbClr val="18181B"/>
-                </a:solidFill>
-                <a:latin typeface="Consolas"/>
-              </a:rPr>
-              <a:t> </a:t>
-            </a:r>
-            <a:r>
-              <a:rPr sz="950" b="0" i="0">
-                <a:solidFill>
-                  <a:srgbClr val="BE185D"/>
-                </a:solidFill>
-                <a:latin typeface="Consolas"/>
-              </a:rPr>
-              <a:t>-H </a:t>
-            </a:r>
-            <a:r>
-              <a:rPr sz="950" b="0" i="0">
-                <a:solidFill>
-                  <a:srgbClr val="18181B"/>
-                </a:solidFill>
-                <a:latin typeface="Consolas"/>
-              </a:rPr>
-              <a:t>"Authorization: </a:t>
-            </a:r>
-            <a:r>
-              <a:rPr sz="950" b="0" i="0">
-                <a:solidFill>
-                  <a:srgbClr val="18181B"/>
-                </a:solidFill>
-                <a:latin typeface="Consolas"/>
-              </a:rPr>
-              <a:t>Bearer </a:t>
-            </a:r>
-            <a:r>
-              <a:rPr sz="950" b="0" i="0">
-                <a:solidFill>
-                  <a:srgbClr val="18181B"/>
-                </a:solidFill>
-                <a:latin typeface="Consolas"/>
-              </a:rPr>
-              <a:t>$(gcloud </a:t>
-            </a:r>
-            <a:r>
-              <a:rPr sz="950" b="0" i="0">
-                <a:solidFill>
-                  <a:srgbClr val="1D4ED8"/>
-                </a:solidFill>
-                <a:latin typeface="Consolas"/>
-              </a:rPr>
-              <a:t>auth </a:t>
-            </a:r>
-            <a:r>
-              <a:rPr sz="950" b="0" i="0">
-                <a:solidFill>
-                  <a:srgbClr val="18181B"/>
-                </a:solidFill>
-                <a:latin typeface="Consolas"/>
-              </a:rPr>
-              <a:t>print-access-token)" </a:t>
-            </a:r>
-            <a:r>
-              <a:rPr sz="950" b="0" i="0">
-                <a:solidFill>
-                  <a:srgbClr val="18181B"/>
-                </a:solidFill>
-                <a:latin typeface="Consolas"/>
-              </a:rPr>
-              <a:t>\</a:t>
-            </a:r>
-          </a:p>
-          <a:p>
-            <a:pPr>
-              <a:spcAft>
-                <a:spcPts val="200"/>
-              </a:spcAft>
-            </a:pPr>
-            <a:r>
-              <a:rPr sz="950" b="0" i="0">
-                <a:solidFill>
-                  <a:srgbClr val="18181B"/>
-                </a:solidFill>
-                <a:latin typeface="Consolas"/>
-              </a:rPr>
-              <a:t> </a:t>
-            </a:r>
-            <a:r>
-              <a:rPr sz="950" b="0" i="0">
-                <a:solidFill>
-                  <a:srgbClr val="18181B"/>
-                </a:solidFill>
-                <a:latin typeface="Consolas"/>
-              </a:rPr>
-              <a:t> </a:t>
-            </a:r>
-            <a:r>
-              <a:rPr sz="950" b="0" i="0">
-                <a:solidFill>
-                  <a:srgbClr val="BE185D"/>
-                </a:solidFill>
-                <a:latin typeface="Consolas"/>
-              </a:rPr>
-              <a:t>-H </a:t>
-            </a:r>
-            <a:r>
-              <a:rPr sz="950" b="0" i="0">
-                <a:solidFill>
-                  <a:srgbClr val="18181B"/>
-                </a:solidFill>
-                <a:latin typeface="Consolas"/>
-              </a:rPr>
-              <a:t>"Content-Type: </a:t>
-            </a:r>
-            <a:r>
-              <a:rPr sz="950" b="0" i="0">
-                <a:solidFill>
-                  <a:srgbClr val="18181B"/>
-                </a:solidFill>
-                <a:latin typeface="Consolas"/>
-              </a:rPr>
-              <a:t>application/json" </a:t>
-            </a:r>
-            <a:r>
-              <a:rPr sz="950" b="0" i="0">
-                <a:solidFill>
-                  <a:srgbClr val="18181B"/>
-                </a:solidFill>
-                <a:latin typeface="Consolas"/>
-              </a:rPr>
-              <a:t>\</a:t>
-            </a:r>
-          </a:p>
-          <a:p>
-            <a:pPr>
-              <a:spcAft>
-                <a:spcPts val="200"/>
-              </a:spcAft>
-            </a:pPr>
-            <a:r>
-              <a:rPr sz="950" b="0" i="0">
-                <a:solidFill>
-                  <a:srgbClr val="18181B"/>
-                </a:solidFill>
-                <a:latin typeface="Consolas"/>
-              </a:rPr>
-              <a:t> </a:t>
-            </a:r>
-            <a:r>
-              <a:rPr sz="950" b="0" i="0">
-                <a:solidFill>
-                  <a:srgbClr val="18181B"/>
-                </a:solidFill>
-                <a:latin typeface="Consolas"/>
-              </a:rPr>
-              <a:t> </a:t>
-            </a:r>
-            <a:r>
-              <a:rPr sz="950" b="0" i="0">
-                <a:solidFill>
-                  <a:srgbClr val="18181B"/>
-                </a:solidFill>
-                <a:latin typeface="Consolas"/>
-              </a:rPr>
-              <a:t>https://us-central1-aiplatform.googleapis.com/v1/projects/${PROJECT_ID}/locations/us-central1/publishers/google/models/gemini-1.5-flash:generateContent </a:t>
-            </a:r>
-            <a:r>
-              <a:rPr sz="950" b="0" i="0">
-                <a:solidFill>
-                  <a:srgbClr val="18181B"/>
-                </a:solidFill>
-                <a:latin typeface="Consolas"/>
-              </a:rPr>
-              <a:t>\</a:t>
-            </a:r>
-          </a:p>
-          <a:p>
-            <a:pPr>
-              <a:spcAft>
-                <a:spcPts val="200"/>
-              </a:spcAft>
-            </a:pPr>
-            <a:r>
-              <a:rPr sz="950" b="0" i="0">
-                <a:solidFill>
-                  <a:srgbClr val="18181B"/>
-                </a:solidFill>
-                <a:latin typeface="Consolas"/>
-              </a:rPr>
-              <a:t> </a:t>
-            </a:r>
-            <a:r>
-              <a:rPr sz="950" b="0" i="0">
-                <a:solidFill>
-                  <a:srgbClr val="18181B"/>
-                </a:solidFill>
-                <a:latin typeface="Consolas"/>
-              </a:rPr>
-              <a:t> </a:t>
-            </a:r>
-            <a:r>
-              <a:rPr sz="950" b="0" i="0">
-                <a:solidFill>
-                  <a:srgbClr val="BE185D"/>
-                </a:solidFill>
-                <a:latin typeface="Consolas"/>
-              </a:rPr>
-              <a:t>-d </a:t>
-            </a:r>
-            <a:r>
-              <a:rPr sz="950" b="0" i="0">
-                <a:solidFill>
-                  <a:srgbClr val="18181B"/>
-                </a:solidFill>
-                <a:latin typeface="Consolas"/>
-              </a:rPr>
-              <a:t>'{</a:t>
-            </a:r>
-          </a:p>
-          <a:p>
-            <a:pPr>
-              <a:spcAft>
-                <a:spcPts val="200"/>
-              </a:spcAft>
-            </a:pPr>
-            <a:r>
-              <a:rPr sz="950" b="0" i="0">
-                <a:solidFill>
-                  <a:srgbClr val="18181B"/>
-                </a:solidFill>
-                <a:latin typeface="Consolas"/>
-              </a:rPr>
-              <a:t> </a:t>
-            </a:r>
-            <a:r>
-              <a:rPr sz="950" b="0" i="0">
-                <a:solidFill>
-                  <a:srgbClr val="18181B"/>
-                </a:solidFill>
-                <a:latin typeface="Consolas"/>
-              </a:rPr>
-              <a:t> </a:t>
-            </a:r>
-            <a:r>
-              <a:rPr sz="950" b="0" i="0">
-                <a:solidFill>
-                  <a:srgbClr val="18181B"/>
-                </a:solidFill>
-                <a:latin typeface="Consolas"/>
-              </a:rPr>
-              <a:t> </a:t>
-            </a:r>
-            <a:r>
-              <a:rPr sz="950" b="0" i="0">
-                <a:solidFill>
-                  <a:srgbClr val="18181B"/>
-                </a:solidFill>
-                <a:latin typeface="Consolas"/>
-              </a:rPr>
-              <a:t> </a:t>
-            </a:r>
-            <a:r>
-              <a:rPr sz="950" b="0" i="0">
-                <a:solidFill>
-                  <a:srgbClr val="18181B"/>
-                </a:solidFill>
-                <a:latin typeface="Consolas"/>
-              </a:rPr>
-              <a:t>"contents": </a:t>
-            </a:r>
-            <a:r>
-              <a:rPr sz="950" b="0" i="0">
-                <a:solidFill>
-                  <a:srgbClr val="18181B"/>
-                </a:solidFill>
-                <a:latin typeface="Consolas"/>
-              </a:rPr>
-              <a:t>{ </a:t>
-            </a:r>
-            <a:r>
-              <a:rPr sz="950" b="0" i="0">
-                <a:solidFill>
-                  <a:srgbClr val="18181B"/>
-                </a:solidFill>
-                <a:latin typeface="Consolas"/>
-              </a:rPr>
-              <a:t>"parts": </a:t>
-            </a:r>
-            <a:r>
-              <a:rPr sz="950" b="0" i="0">
-                <a:solidFill>
-                  <a:srgbClr val="18181B"/>
-                </a:solidFill>
-                <a:latin typeface="Consolas"/>
-              </a:rPr>
-              <a:t>{ </a:t>
-            </a:r>
-            <a:r>
-              <a:rPr sz="950" b="0" i="0">
-                <a:solidFill>
-                  <a:srgbClr val="18181B"/>
-                </a:solidFill>
-                <a:latin typeface="Consolas"/>
-              </a:rPr>
-              <a:t>"text": </a:t>
-            </a:r>
-            <a:r>
-              <a:rPr sz="950" b="0" i="0">
-                <a:solidFill>
-                  <a:srgbClr val="18181B"/>
-                </a:solidFill>
-                <a:latin typeface="Consolas"/>
-              </a:rPr>
-              <a:t>"Explain </a:t>
-            </a:r>
-            <a:r>
-              <a:rPr sz="950" b="0" i="0">
-                <a:solidFill>
-                  <a:srgbClr val="18181B"/>
-                </a:solidFill>
-                <a:latin typeface="Consolas"/>
-              </a:rPr>
-              <a:t>transfer </a:t>
-            </a:r>
-            <a:r>
-              <a:rPr sz="950" b="0" i="0">
-                <a:solidFill>
-                  <a:srgbClr val="18181B"/>
-                </a:solidFill>
-                <a:latin typeface="Consolas"/>
-              </a:rPr>
-              <a:t>learning." </a:t>
-            </a:r>
-            <a:r>
-              <a:rPr sz="950" b="0" i="0">
-                <a:solidFill>
-                  <a:srgbClr val="18181B"/>
-                </a:solidFill>
-                <a:latin typeface="Consolas"/>
-              </a:rPr>
-              <a:t>} </a:t>
-            </a:r>
-            <a:r>
-              <a:rPr sz="950" b="0" i="0">
-                <a:solidFill>
-                  <a:srgbClr val="18181B"/>
-                </a:solidFill>
-                <a:latin typeface="Consolas"/>
-              </a:rPr>
-              <a:t>},</a:t>
-            </a:r>
-          </a:p>
-          <a:p>
-            <a:pPr>
-              <a:spcAft>
-                <a:spcPts val="200"/>
-              </a:spcAft>
-            </a:pPr>
-            <a:r>
-              <a:rPr sz="950" b="0" i="0">
-                <a:solidFill>
-                  <a:srgbClr val="18181B"/>
-                </a:solidFill>
-                <a:latin typeface="Consolas"/>
-              </a:rPr>
-              <a:t> </a:t>
-            </a:r>
-            <a:r>
-              <a:rPr sz="950" b="0" i="0">
-                <a:solidFill>
-                  <a:srgbClr val="18181B"/>
-                </a:solidFill>
-                <a:latin typeface="Consolas"/>
-              </a:rPr>
-              <a:t> </a:t>
-            </a:r>
-            <a:r>
-              <a:rPr sz="950" b="0" i="0">
-                <a:solidFill>
-                  <a:srgbClr val="18181B"/>
-                </a:solidFill>
-                <a:latin typeface="Consolas"/>
-              </a:rPr>
-              <a:t> </a:t>
-            </a:r>
-            <a:r>
-              <a:rPr sz="950" b="0" i="0">
-                <a:solidFill>
-                  <a:srgbClr val="18181B"/>
-                </a:solidFill>
-                <a:latin typeface="Consolas"/>
-              </a:rPr>
-              <a:t> </a:t>
-            </a:r>
-            <a:r>
-              <a:rPr sz="950" b="0" i="0">
-                <a:solidFill>
-                  <a:srgbClr val="18181B"/>
-                </a:solidFill>
-                <a:latin typeface="Consolas"/>
-              </a:rPr>
-              <a:t>"generationConfig": </a:t>
-            </a:r>
-            <a:r>
-              <a:rPr sz="950" b="0" i="0">
-                <a:solidFill>
-                  <a:srgbClr val="18181B"/>
-                </a:solidFill>
-                <a:latin typeface="Consolas"/>
-              </a:rPr>
-              <a:t>{ </a:t>
-            </a:r>
-            <a:r>
-              <a:rPr sz="950" b="0" i="0">
-                <a:solidFill>
-                  <a:srgbClr val="18181B"/>
-                </a:solidFill>
-                <a:latin typeface="Consolas"/>
-              </a:rPr>
-              <a:t>"temperature": </a:t>
-            </a:r>
-            <a:r>
-              <a:rPr sz="950" b="0" i="0">
-                <a:solidFill>
-                  <a:srgbClr val="18181B"/>
-                </a:solidFill>
-                <a:latin typeface="Consolas"/>
-              </a:rPr>
-              <a:t>0.4 </a:t>
-            </a:r>
-            <a:r>
-              <a:rPr sz="950" b="0" i="0">
-                <a:solidFill>
-                  <a:srgbClr val="18181B"/>
-                </a:solidFill>
-                <a:latin typeface="Consolas"/>
-              </a:rPr>
-              <a:t>}</a:t>
-            </a:r>
-          </a:p>
-          <a:p>
-            <a:pPr>
-              <a:spcAft>
-                <a:spcPts val="200"/>
-              </a:spcAft>
-            </a:pPr>
-            <a:r>
-              <a:rPr sz="950" b="0" i="0">
-                <a:solidFill>
-                  <a:srgbClr val="18181B"/>
-                </a:solidFill>
-                <a:latin typeface="Consolas"/>
-              </a:rPr>
-              <a:t> </a:t>
-            </a:r>
-            <a:r>
-              <a:rPr sz="950" b="0" i="0">
-                <a:solidFill>
-                  <a:srgbClr val="18181B"/>
-                </a:solidFill>
-                <a:latin typeface="Consolas"/>
-              </a:rPr>
-              <a:t> </a:t>
-            </a:r>
-            <a:r>
-              <a:rPr sz="950" b="0" i="0">
-                <a:solidFill>
-                  <a:srgbClr val="18181B"/>
-                </a:solidFill>
-                <a:latin typeface="Consolas"/>
-              </a:rPr>
-              <a:t>}'</a:t>
-            </a:r>
-          </a:p>
-        </p:txBody>
-      </p:sp>
-      <p:sp>
-        <p:nvSpPr>
-          <p:cNvPr id="6" name="Rectangle 5"/>
-          <p:cNvSpPr/>
-          <p:nvPr/>
-        </p:nvSpPr>
-        <p:spPr>
-          <a:xfrm>
-            <a:off x="731520" y="5029200"/>
-            <a:ext cx="10725912" cy="1097280"/>
+            <a:off x="731520" y="4754880"/>
+            <a:ext cx="6217920" cy="1371600"/>
           </a:xfrm>
           <a:prstGeom prst="rect">
             <a:avLst/>
@@ -9423,7 +10321,76 @@
                 </a:solidFill>
                 <a:latin typeface="Segoe UI"/>
               </a:rPr>
-              <a:t>Sysadmins run these CLI checks inside deployment test files to verify that Google Cloud credentials and API routing policies are properly aligned before launching apps.</a:t>
+              <a:t>On the exam, if a scenario asks to connect private enterprise PDF documents with LLM outputs without model retraining, the answer is always RAG with Vector Search.</a:t>
+            </a:r>
+          </a:p>
+        </p:txBody>
+      </p:sp>
+      <p:sp>
+        <p:nvSpPr>
+          <p:cNvPr id="6" name="Rounded Rectangle 5"/>
+          <p:cNvSpPr/>
+          <p:nvPr/>
+        </p:nvSpPr>
+        <p:spPr>
+          <a:xfrm>
+            <a:off x="7315200" y="1645920"/>
+            <a:ext cx="4114800" cy="4480560"/>
+          </a:xfrm>
+          <a:prstGeom prst="roundRect">
+            <a:avLst/>
+          </a:prstGeom>
+          <a:solidFill>
+            <a:srgbClr val="FFFFFF"/>
+          </a:solidFill>
+          <a:ln w="15240">
+            <a:solidFill>
+              <a:srgbClr val="047857"/>
+            </a:solidFill>
+          </a:ln>
+        </p:spPr>
+        <p:style>
+          <a:lnRef idx="1">
+            <a:schemeClr val="accent1"/>
+          </a:lnRef>
+          <a:fillRef idx="3">
+            <a:schemeClr val="accent1"/>
+          </a:fillRef>
+          <a:effectRef idx="2">
+            <a:schemeClr val="accent1"/>
+          </a:effectRef>
+          <a:fontRef idx="minor">
+            <a:schemeClr val="lt1"/>
+          </a:fontRef>
+        </p:style>
+        <p:txBody>
+          <a:bodyPr rtlCol="0" anchor="ctr" wrap="square" lIns="228600" rIns="228600" tIns="182880" bIns="182880"/>
+          <a:lstStyle/>
+          <a:p>
+            <a:pPr algn="ctr">
+              <a:spcAft>
+                <a:spcPts val="1200"/>
+              </a:spcAft>
+            </a:pPr>
+            <a:r>
+              <a:rPr sz="1600" b="1" i="0">
+                <a:solidFill>
+                  <a:srgbClr val="18181B"/>
+                </a:solidFill>
+                <a:latin typeface="Segoe UI"/>
+              </a:rPr>
+              <a:t>Exam Tip</a:t>
+            </a:r>
+          </a:p>
+          <a:p>
+            <a:r>
+              <a:rPr sz="1150" b="0" i="0">
+                <a:solidFill>
+                  <a:srgbClr val="3F3F46"/>
+                </a:solidFill>
+                <a:latin typeface="Segoe UI"/>
+              </a:rPr>
+              <a:t>If the exam asks to adapt a model to proprietary, frequently changing documentation under tight budgets, **Retrieval-Augmented Generation (RAG)** is the correct choice over custom fine-tuning.</a:t>
             </a:r>
           </a:p>
         </p:txBody>
